--- a/u04b_interfaces/notes/_interfaces2 - default and static methods.pptx
+++ b/u04b_interfaces/notes/_interfaces2 - default and static methods.pptx
@@ -5,10 +5,10 @@
     <p:sldMasterId id="2147483648" r:id="rId1"/>
   </p:sldMasterIdLst>
   <p:notesMasterIdLst>
-    <p:notesMasterId r:id="rId31"/>
+    <p:notesMasterId r:id="rId33"/>
   </p:notesMasterIdLst>
   <p:handoutMasterIdLst>
-    <p:handoutMasterId r:id="rId32"/>
+    <p:handoutMasterId r:id="rId34"/>
   </p:handoutMasterIdLst>
   <p:sldIdLst>
     <p:sldId id="664" r:id="rId2"/>
@@ -34,12 +34,14 @@
     <p:sldId id="691" r:id="rId22"/>
     <p:sldId id="692" r:id="rId23"/>
     <p:sldId id="693" r:id="rId24"/>
-    <p:sldId id="657" r:id="rId25"/>
-    <p:sldId id="658" r:id="rId26"/>
-    <p:sldId id="659" r:id="rId27"/>
-    <p:sldId id="660" r:id="rId28"/>
-    <p:sldId id="662" r:id="rId29"/>
-    <p:sldId id="674" r:id="rId30"/>
+    <p:sldId id="694" r:id="rId25"/>
+    <p:sldId id="695" r:id="rId26"/>
+    <p:sldId id="657" r:id="rId27"/>
+    <p:sldId id="658" r:id="rId28"/>
+    <p:sldId id="659" r:id="rId29"/>
+    <p:sldId id="660" r:id="rId30"/>
+    <p:sldId id="662" r:id="rId31"/>
+    <p:sldId id="674" r:id="rId32"/>
   </p:sldIdLst>
   <p:sldSz cx="9144000" cy="6858000" type="screen4x3"/>
   <p:notesSz cx="6858000" cy="9144000"/>
@@ -2766,6 +2768,268 @@
 </file>
 
 <file path=ppt/notesSlides/notesSlide22.xml><?xml version="1.0" encoding="utf-8"?>
+<p:notes xmlns:a="http://schemas.openxmlformats.org/drawingml/2006/main" xmlns:r="http://schemas.openxmlformats.org/officeDocument/2006/relationships" xmlns:p="http://schemas.openxmlformats.org/presentationml/2006/main">
+  <p:cSld>
+    <p:spTree>
+      <p:nvGrpSpPr>
+        <p:cNvPr id="1" name="">
+          <a:extLst>
+            <a:ext uri="{FF2B5EF4-FFF2-40B4-BE49-F238E27FC236}">
+              <a16:creationId xmlns:a16="http://schemas.microsoft.com/office/drawing/2014/main" id="{74C9C865-FA76-9261-9BE6-A48654DDAC96}"/>
+            </a:ext>
+          </a:extLst>
+        </p:cNvPr>
+        <p:cNvGrpSpPr/>
+        <p:nvPr/>
+      </p:nvGrpSpPr>
+      <p:grpSpPr>
+        <a:xfrm>
+          <a:off x="0" y="0"/>
+          <a:ext cx="0" cy="0"/>
+          <a:chOff x="0" y="0"/>
+          <a:chExt cx="0" cy="0"/>
+        </a:xfrm>
+      </p:grpSpPr>
+      <p:sp>
+        <p:nvSpPr>
+          <p:cNvPr id="113666" name="Rectangle 2">
+            <a:extLst>
+              <a:ext uri="{FF2B5EF4-FFF2-40B4-BE49-F238E27FC236}">
+                <a16:creationId xmlns:a16="http://schemas.microsoft.com/office/drawing/2014/main" id="{7C3A8BAA-7F0F-2F27-A476-A05D0BCA9642}"/>
+              </a:ext>
+            </a:extLst>
+          </p:cNvPr>
+          <p:cNvSpPr>
+            <a:spLocks noGrp="1" noRot="1" noChangeAspect="1" noChangeArrowheads="1" noTextEdit="1"/>
+          </p:cNvSpPr>
+          <p:nvPr>
+            <p:ph type="sldImg"/>
+          </p:nvPr>
+        </p:nvSpPr>
+        <p:spPr>
+          <a:ln/>
+        </p:spPr>
+      </p:sp>
+      <p:sp>
+        <p:nvSpPr>
+          <p:cNvPr id="113667" name="Rectangle 3">
+            <a:extLst>
+              <a:ext uri="{FF2B5EF4-FFF2-40B4-BE49-F238E27FC236}">
+                <a16:creationId xmlns:a16="http://schemas.microsoft.com/office/drawing/2014/main" id="{AA69FA42-C855-966C-0764-3B152BA9A8F0}"/>
+              </a:ext>
+            </a:extLst>
+          </p:cNvPr>
+          <p:cNvSpPr>
+            <a:spLocks noGrp="1" noChangeArrowheads="1"/>
+          </p:cNvSpPr>
+          <p:nvPr>
+            <p:ph type="body" idx="1"/>
+          </p:nvPr>
+        </p:nvSpPr>
+        <p:spPr/>
+        <p:txBody>
+          <a:bodyPr/>
+          <a:lstStyle/>
+          <a:p>
+            <a:r>
+              <a:rPr lang="en-US" sz="1200" b="1" i="0" kern="1200" dirty="0">
+                <a:solidFill>
+                  <a:schemeClr val="tx1"/>
+                </a:solidFill>
+                <a:effectLst/>
+                <a:latin typeface="Times New Roman" panose="02020603050405020304" pitchFamily="18" charset="0"/>
+                <a:ea typeface="+mn-ea"/>
+                <a:cs typeface="+mn-cs"/>
+              </a:rPr>
+              <a:t>Note that private variables are still not allowed.</a:t>
+            </a:r>
+            <a:endParaRPr lang="en-US" altLang="en-US" dirty="0"/>
+          </a:p>
+        </p:txBody>
+      </p:sp>
+    </p:spTree>
+    <p:extLst>
+      <p:ext uri="{BB962C8B-B14F-4D97-AF65-F5344CB8AC3E}">
+        <p14:creationId xmlns:p14="http://schemas.microsoft.com/office/powerpoint/2010/main" val="3058041928"/>
+      </p:ext>
+    </p:extLst>
+  </p:cSld>
+  <p:clrMapOvr>
+    <a:masterClrMapping/>
+  </p:clrMapOvr>
+</p:notes>
+</file>
+
+<file path=ppt/notesSlides/notesSlide23.xml><?xml version="1.0" encoding="utf-8"?>
+<p:notes xmlns:a="http://schemas.openxmlformats.org/drawingml/2006/main" xmlns:r="http://schemas.openxmlformats.org/officeDocument/2006/relationships" xmlns:p="http://schemas.openxmlformats.org/presentationml/2006/main">
+  <p:cSld>
+    <p:spTree>
+      <p:nvGrpSpPr>
+        <p:cNvPr id="1" name="">
+          <a:extLst>
+            <a:ext uri="{FF2B5EF4-FFF2-40B4-BE49-F238E27FC236}">
+              <a16:creationId xmlns:a16="http://schemas.microsoft.com/office/drawing/2014/main" id="{1FC8481B-7D65-4A0D-240C-C7667F688D00}"/>
+            </a:ext>
+          </a:extLst>
+        </p:cNvPr>
+        <p:cNvGrpSpPr/>
+        <p:nvPr/>
+      </p:nvGrpSpPr>
+      <p:grpSpPr>
+        <a:xfrm>
+          <a:off x="0" y="0"/>
+          <a:ext cx="0" cy="0"/>
+          <a:chOff x="0" y="0"/>
+          <a:chExt cx="0" cy="0"/>
+        </a:xfrm>
+      </p:grpSpPr>
+      <p:sp>
+        <p:nvSpPr>
+          <p:cNvPr id="113666" name="Rectangle 2">
+            <a:extLst>
+              <a:ext uri="{FF2B5EF4-FFF2-40B4-BE49-F238E27FC236}">
+                <a16:creationId xmlns:a16="http://schemas.microsoft.com/office/drawing/2014/main" id="{A07F4433-8818-A7CF-6FC4-5EA6EBEAD233}"/>
+              </a:ext>
+            </a:extLst>
+          </p:cNvPr>
+          <p:cNvSpPr>
+            <a:spLocks noGrp="1" noRot="1" noChangeAspect="1" noChangeArrowheads="1" noTextEdit="1"/>
+          </p:cNvSpPr>
+          <p:nvPr>
+            <p:ph type="sldImg"/>
+          </p:nvPr>
+        </p:nvSpPr>
+        <p:spPr>
+          <a:ln/>
+        </p:spPr>
+      </p:sp>
+      <p:sp>
+        <p:nvSpPr>
+          <p:cNvPr id="113667" name="Rectangle 3">
+            <a:extLst>
+              <a:ext uri="{FF2B5EF4-FFF2-40B4-BE49-F238E27FC236}">
+                <a16:creationId xmlns:a16="http://schemas.microsoft.com/office/drawing/2014/main" id="{9C27105D-B94E-221A-E675-AEFA1BFA5B3D}"/>
+              </a:ext>
+            </a:extLst>
+          </p:cNvPr>
+          <p:cNvSpPr>
+            <a:spLocks noGrp="1" noChangeArrowheads="1"/>
+          </p:cNvSpPr>
+          <p:nvPr>
+            <p:ph type="body" idx="1"/>
+          </p:nvPr>
+        </p:nvSpPr>
+        <p:spPr/>
+        <p:txBody>
+          <a:bodyPr/>
+          <a:lstStyle/>
+          <a:p>
+            <a:r>
+              <a:rPr lang="en-US" sz="1200" b="0" i="0" kern="1200" dirty="0">
+                <a:solidFill>
+                  <a:schemeClr val="tx1"/>
+                </a:solidFill>
+                <a:effectLst/>
+                <a:latin typeface="Times New Roman" panose="02020603050405020304" pitchFamily="18" charset="0"/>
+                <a:ea typeface="+mn-ea"/>
+                <a:cs typeface="+mn-cs"/>
+              </a:rPr>
+              <a:t>Methods in an interface are normally abstract and therefore are only declared, not defined. I.e. you just put a semicolon.</a:t>
+            </a:r>
+          </a:p>
+          <a:p>
+            <a:r>
+              <a:rPr lang="en-US" altLang="en-US" sz="1200" b="0" i="0" kern="1200" dirty="0">
+                <a:solidFill>
+                  <a:schemeClr val="tx1"/>
+                </a:solidFill>
+                <a:effectLst/>
+                <a:latin typeface="Times New Roman" panose="02020603050405020304" pitchFamily="18" charset="0"/>
+                <a:ea typeface="+mn-ea"/>
+                <a:cs typeface="+mn-cs"/>
+              </a:rPr>
+              <a:t>You can never combine </a:t>
+            </a:r>
+            <a:r>
+              <a:rPr lang="en-US" altLang="en-US" sz="1200" b="1" i="0" kern="1200" dirty="0">
+                <a:solidFill>
+                  <a:schemeClr val="tx1"/>
+                </a:solidFill>
+                <a:effectLst/>
+                <a:latin typeface="Times New Roman" panose="02020603050405020304" pitchFamily="18" charset="0"/>
+                <a:ea typeface="+mn-ea"/>
+                <a:cs typeface="+mn-cs"/>
+              </a:rPr>
+              <a:t>private</a:t>
+            </a:r>
+            <a:r>
+              <a:rPr lang="en-US" altLang="en-US" sz="1200" b="0" i="0" kern="1200" dirty="0">
+                <a:solidFill>
+                  <a:schemeClr val="tx1"/>
+                </a:solidFill>
+                <a:effectLst/>
+                <a:latin typeface="Times New Roman" panose="02020603050405020304" pitchFamily="18" charset="0"/>
+                <a:ea typeface="+mn-ea"/>
+                <a:cs typeface="+mn-cs"/>
+              </a:rPr>
+              <a:t> and </a:t>
+            </a:r>
+            <a:r>
+              <a:rPr lang="en-US" altLang="en-US" sz="1200" b="1" i="0" kern="1200" dirty="0">
+                <a:solidFill>
+                  <a:schemeClr val="tx1"/>
+                </a:solidFill>
+                <a:effectLst/>
+                <a:latin typeface="Times New Roman" panose="02020603050405020304" pitchFamily="18" charset="0"/>
+                <a:ea typeface="+mn-ea"/>
+                <a:cs typeface="+mn-cs"/>
+              </a:rPr>
+              <a:t>abstract</a:t>
+            </a:r>
+            <a:r>
+              <a:rPr lang="en-US" altLang="en-US" sz="1200" b="0" i="0" kern="1200" dirty="0">
+                <a:solidFill>
+                  <a:schemeClr val="tx1"/>
+                </a:solidFill>
+                <a:effectLst/>
+                <a:latin typeface="Times New Roman" panose="02020603050405020304" pitchFamily="18" charset="0"/>
+                <a:ea typeface="+mn-ea"/>
+                <a:cs typeface="+mn-cs"/>
+              </a:rPr>
+              <a:t>.</a:t>
+            </a:r>
+          </a:p>
+          <a:p>
+            <a:r>
+              <a:rPr lang="en-US" altLang="en-US" sz="1200" b="0" i="0" kern="1200" dirty="0">
+                <a:solidFill>
+                  <a:schemeClr val="tx1"/>
+                </a:solidFill>
+                <a:effectLst/>
+                <a:latin typeface="Times New Roman" panose="02020603050405020304" pitchFamily="18" charset="0"/>
+                <a:ea typeface="+mn-ea"/>
+                <a:cs typeface="+mn-cs"/>
+              </a:rPr>
+              <a:t>The rest must be defined. I.e. they must be concrete. I.e. they must have implementation.</a:t>
+            </a:r>
+            <a:endParaRPr lang="en-US" altLang="en-US" b="0" dirty="0"/>
+          </a:p>
+        </p:txBody>
+      </p:sp>
+    </p:spTree>
+    <p:extLst>
+      <p:ext uri="{BB962C8B-B14F-4D97-AF65-F5344CB8AC3E}">
+        <p14:creationId xmlns:p14="http://schemas.microsoft.com/office/powerpoint/2010/main" val="4178367570"/>
+      </p:ext>
+    </p:extLst>
+  </p:cSld>
+  <p:clrMapOvr>
+    <a:masterClrMapping/>
+  </p:clrMapOvr>
+</p:notes>
+</file>
+
+<file path=ppt/notesSlides/notesSlide24.xml><?xml version="1.0" encoding="utf-8"?>
 <p:notes xmlns:a="http://schemas.openxmlformats.org/drawingml/2006/main" xmlns:r="http://schemas.openxmlformats.org/officeDocument/2006/relationships" xmlns:p="http://schemas.openxmlformats.org/presentationml/2006/main">
   <p:cSld>
     <p:spTree>
@@ -12098,6 +12362,1712 @@
   <p:cSld>
     <p:spTree>
       <p:nvGrpSpPr>
+        <p:cNvPr id="1" name="">
+          <a:extLst>
+            <a:ext uri="{FF2B5EF4-FFF2-40B4-BE49-F238E27FC236}">
+              <a16:creationId xmlns:a16="http://schemas.microsoft.com/office/drawing/2014/main" id="{33F791DD-ECFD-C278-F6CA-6ECC11F61D3B}"/>
+            </a:ext>
+          </a:extLst>
+        </p:cNvPr>
+        <p:cNvGrpSpPr/>
+        <p:nvPr/>
+      </p:nvGrpSpPr>
+      <p:grpSpPr>
+        <a:xfrm>
+          <a:off x="0" y="0"/>
+          <a:ext cx="0" cy="0"/>
+          <a:chOff x="0" y="0"/>
+          <a:chExt cx="0" cy="0"/>
+        </a:xfrm>
+      </p:grpSpPr>
+      <p:sp>
+        <p:nvSpPr>
+          <p:cNvPr id="4" name="TextBox 3">
+            <a:extLst>
+              <a:ext uri="{FF2B5EF4-FFF2-40B4-BE49-F238E27FC236}">
+                <a16:creationId xmlns:a16="http://schemas.microsoft.com/office/drawing/2014/main" id="{C3464A74-43C1-BC27-FD35-6049533CB7B0}"/>
+              </a:ext>
+            </a:extLst>
+          </p:cNvPr>
+          <p:cNvSpPr txBox="1"/>
+          <p:nvPr/>
+        </p:nvSpPr>
+        <p:spPr>
+          <a:xfrm>
+            <a:off x="807720" y="2190681"/>
+            <a:ext cx="7310120" cy="2554545"/>
+          </a:xfrm>
+          <a:prstGeom prst="rect">
+            <a:avLst/>
+          </a:prstGeom>
+          <a:noFill/>
+        </p:spPr>
+        <p:txBody>
+          <a:bodyPr wrap="square">
+            <a:spAutoFit/>
+          </a:bodyPr>
+          <a:lstStyle/>
+          <a:p>
+            <a:r>
+              <a:rPr lang="en-US" sz="4000" dirty="0"/>
+              <a:t>Once concrete methods were added to interfaces, helper methods (i.e. private methods) needed to allowed.</a:t>
+            </a:r>
+          </a:p>
+        </p:txBody>
+      </p:sp>
+      <p:sp>
+        <p:nvSpPr>
+          <p:cNvPr id="5" name="Title 1">
+            <a:extLst>
+              <a:ext uri="{FF2B5EF4-FFF2-40B4-BE49-F238E27FC236}">
+                <a16:creationId xmlns:a16="http://schemas.microsoft.com/office/drawing/2014/main" id="{D683CC4F-12F3-4C1D-175F-CFFABAC98776}"/>
+              </a:ext>
+            </a:extLst>
+          </p:cNvPr>
+          <p:cNvSpPr txBox="1">
+            <a:spLocks/>
+          </p:cNvSpPr>
+          <p:nvPr/>
+        </p:nvSpPr>
+        <p:spPr>
+          <a:xfrm rot="401501">
+            <a:off x="-132396" y="340025"/>
+            <a:ext cx="10197282" cy="1143000"/>
+          </a:xfrm>
+          <a:prstGeom prst="rect">
+            <a:avLst/>
+          </a:prstGeom>
+          <a:ln>
+            <a:noFill/>
+          </a:ln>
+          <a:effectLst>
+            <a:outerShdw blurRad="225425" dist="50800" dir="5220000" algn="ctr">
+              <a:srgbClr val="000000">
+                <a:alpha val="33000"/>
+              </a:srgbClr>
+            </a:outerShdw>
+          </a:effectLst>
+          <a:scene3d>
+            <a:camera prst="perspectiveFront" fov="3300000">
+              <a:rot lat="486000" lon="19530000" rev="174000"/>
+            </a:camera>
+            <a:lightRig rig="harsh" dir="t">
+              <a:rot lat="0" lon="0" rev="3000000"/>
+            </a:lightRig>
+          </a:scene3d>
+          <a:sp3d extrusionH="254000" contourW="19050">
+            <a:bevelT w="82550" h="44450" prst="angle"/>
+            <a:bevelB w="82550" h="44450" prst="angle"/>
+            <a:contourClr>
+              <a:srgbClr val="FFFFFF"/>
+            </a:contourClr>
+          </a:sp3d>
+        </p:spPr>
+        <p:txBody>
+          <a:bodyPr/>
+          <a:lstStyle>
+            <a:lvl1pPr algn="ctr" rtl="0" fontAlgn="base">
+              <a:spcBef>
+                <a:spcPct val="0"/>
+              </a:spcBef>
+              <a:spcAft>
+                <a:spcPct val="0"/>
+              </a:spcAft>
+              <a:defRPr sz="4400" kern="1200">
+                <a:solidFill>
+                  <a:schemeClr val="tx2"/>
+                </a:solidFill>
+                <a:latin typeface="+mj-lt"/>
+                <a:ea typeface="+mj-ea"/>
+                <a:cs typeface="+mj-cs"/>
+              </a:defRPr>
+            </a:lvl1pPr>
+            <a:lvl2pPr algn="ctr" rtl="0" fontAlgn="base">
+              <a:spcBef>
+                <a:spcPct val="0"/>
+              </a:spcBef>
+              <a:spcAft>
+                <a:spcPct val="0"/>
+              </a:spcAft>
+              <a:defRPr sz="4400">
+                <a:solidFill>
+                  <a:schemeClr val="tx2"/>
+                </a:solidFill>
+                <a:latin typeface="Times New Roman" panose="02020603050405020304" pitchFamily="18" charset="0"/>
+              </a:defRPr>
+            </a:lvl2pPr>
+            <a:lvl3pPr algn="ctr" rtl="0" fontAlgn="base">
+              <a:spcBef>
+                <a:spcPct val="0"/>
+              </a:spcBef>
+              <a:spcAft>
+                <a:spcPct val="0"/>
+              </a:spcAft>
+              <a:defRPr sz="4400">
+                <a:solidFill>
+                  <a:schemeClr val="tx2"/>
+                </a:solidFill>
+                <a:latin typeface="Times New Roman" panose="02020603050405020304" pitchFamily="18" charset="0"/>
+              </a:defRPr>
+            </a:lvl3pPr>
+            <a:lvl4pPr algn="ctr" rtl="0" fontAlgn="base">
+              <a:spcBef>
+                <a:spcPct val="0"/>
+              </a:spcBef>
+              <a:spcAft>
+                <a:spcPct val="0"/>
+              </a:spcAft>
+              <a:defRPr sz="4400">
+                <a:solidFill>
+                  <a:schemeClr val="tx2"/>
+                </a:solidFill>
+                <a:latin typeface="Times New Roman" panose="02020603050405020304" pitchFamily="18" charset="0"/>
+              </a:defRPr>
+            </a:lvl4pPr>
+            <a:lvl5pPr algn="ctr" rtl="0" fontAlgn="base">
+              <a:spcBef>
+                <a:spcPct val="0"/>
+              </a:spcBef>
+              <a:spcAft>
+                <a:spcPct val="0"/>
+              </a:spcAft>
+              <a:defRPr sz="4400">
+                <a:solidFill>
+                  <a:schemeClr val="tx2"/>
+                </a:solidFill>
+                <a:latin typeface="Times New Roman" panose="02020603050405020304" pitchFamily="18" charset="0"/>
+              </a:defRPr>
+            </a:lvl5pPr>
+            <a:lvl6pPr marL="457200" algn="ctr" rtl="0" fontAlgn="base">
+              <a:spcBef>
+                <a:spcPct val="0"/>
+              </a:spcBef>
+              <a:spcAft>
+                <a:spcPct val="0"/>
+              </a:spcAft>
+              <a:defRPr sz="4400">
+                <a:solidFill>
+                  <a:schemeClr val="tx2"/>
+                </a:solidFill>
+                <a:latin typeface="Times New Roman" panose="02020603050405020304" pitchFamily="18" charset="0"/>
+              </a:defRPr>
+            </a:lvl6pPr>
+            <a:lvl7pPr marL="914400" algn="ctr" rtl="0" fontAlgn="base">
+              <a:spcBef>
+                <a:spcPct val="0"/>
+              </a:spcBef>
+              <a:spcAft>
+                <a:spcPct val="0"/>
+              </a:spcAft>
+              <a:defRPr sz="4400">
+                <a:solidFill>
+                  <a:schemeClr val="tx2"/>
+                </a:solidFill>
+                <a:latin typeface="Times New Roman" panose="02020603050405020304" pitchFamily="18" charset="0"/>
+              </a:defRPr>
+            </a:lvl7pPr>
+            <a:lvl8pPr marL="1371600" algn="ctr" rtl="0" fontAlgn="base">
+              <a:spcBef>
+                <a:spcPct val="0"/>
+              </a:spcBef>
+              <a:spcAft>
+                <a:spcPct val="0"/>
+              </a:spcAft>
+              <a:defRPr sz="4400">
+                <a:solidFill>
+                  <a:schemeClr val="tx2"/>
+                </a:solidFill>
+                <a:latin typeface="Times New Roman" panose="02020603050405020304" pitchFamily="18" charset="0"/>
+              </a:defRPr>
+            </a:lvl8pPr>
+            <a:lvl9pPr marL="1828800" algn="ctr" rtl="0" fontAlgn="base">
+              <a:spcBef>
+                <a:spcPct val="0"/>
+              </a:spcBef>
+              <a:spcAft>
+                <a:spcPct val="0"/>
+              </a:spcAft>
+              <a:defRPr sz="4400">
+                <a:solidFill>
+                  <a:schemeClr val="tx2"/>
+                </a:solidFill>
+                <a:latin typeface="Times New Roman" panose="02020603050405020304" pitchFamily="18" charset="0"/>
+              </a:defRPr>
+            </a:lvl9pPr>
+          </a:lstStyle>
+          <a:p>
+            <a:r>
+              <a:rPr lang="en-US" sz="6000" dirty="0">
+                <a:solidFill>
+                  <a:srgbClr val="7030A0"/>
+                </a:solidFill>
+                <a:latin typeface="Abadi" panose="020B0604020104020204" pitchFamily="34" charset="0"/>
+              </a:rPr>
+              <a:t>Private Methods</a:t>
+            </a:r>
+          </a:p>
+        </p:txBody>
+      </p:sp>
+    </p:spTree>
+    <p:extLst>
+      <p:ext uri="{BB962C8B-B14F-4D97-AF65-F5344CB8AC3E}">
+        <p14:creationId xmlns:p14="http://schemas.microsoft.com/office/powerpoint/2010/main" val="2281212605"/>
+      </p:ext>
+    </p:extLst>
+  </p:cSld>
+  <p:clrMapOvr>
+    <a:masterClrMapping/>
+  </p:clrMapOvr>
+</p:sld>
+</file>
+
+<file path=ppt/slides/slide25.xml><?xml version="1.0" encoding="utf-8"?>
+<p:sld xmlns:a="http://schemas.openxmlformats.org/drawingml/2006/main" xmlns:r="http://schemas.openxmlformats.org/officeDocument/2006/relationships" xmlns:p="http://schemas.openxmlformats.org/presentationml/2006/main">
+  <p:cSld>
+    <p:spTree>
+      <p:nvGrpSpPr>
+        <p:cNvPr id="1" name="">
+          <a:extLst>
+            <a:ext uri="{FF2B5EF4-FFF2-40B4-BE49-F238E27FC236}">
+              <a16:creationId xmlns:a16="http://schemas.microsoft.com/office/drawing/2014/main" id="{217E1E74-8535-692A-35A2-8FDC5138A2A3}"/>
+            </a:ext>
+          </a:extLst>
+        </p:cNvPr>
+        <p:cNvGrpSpPr/>
+        <p:nvPr/>
+      </p:nvGrpSpPr>
+      <p:grpSpPr>
+        <a:xfrm>
+          <a:off x="0" y="0"/>
+          <a:ext cx="0" cy="0"/>
+          <a:chOff x="0" y="0"/>
+          <a:chExt cx="0" cy="0"/>
+        </a:xfrm>
+      </p:grpSpPr>
+      <p:sp>
+        <p:nvSpPr>
+          <p:cNvPr id="5" name="Title 1">
+            <a:extLst>
+              <a:ext uri="{FF2B5EF4-FFF2-40B4-BE49-F238E27FC236}">
+                <a16:creationId xmlns:a16="http://schemas.microsoft.com/office/drawing/2014/main" id="{25D96D05-573D-1004-42A5-733842684315}"/>
+              </a:ext>
+            </a:extLst>
+          </p:cNvPr>
+          <p:cNvSpPr txBox="1">
+            <a:spLocks/>
+          </p:cNvSpPr>
+          <p:nvPr/>
+        </p:nvSpPr>
+        <p:spPr>
+          <a:xfrm rot="401501">
+            <a:off x="-132396" y="340025"/>
+            <a:ext cx="10197282" cy="1143000"/>
+          </a:xfrm>
+          <a:prstGeom prst="rect">
+            <a:avLst/>
+          </a:prstGeom>
+          <a:ln>
+            <a:noFill/>
+          </a:ln>
+          <a:effectLst>
+            <a:outerShdw blurRad="225425" dist="50800" dir="5220000" algn="ctr">
+              <a:srgbClr val="000000">
+                <a:alpha val="33000"/>
+              </a:srgbClr>
+            </a:outerShdw>
+          </a:effectLst>
+          <a:scene3d>
+            <a:camera prst="perspectiveFront" fov="3300000">
+              <a:rot lat="486000" lon="19530000" rev="174000"/>
+            </a:camera>
+            <a:lightRig rig="harsh" dir="t">
+              <a:rot lat="0" lon="0" rev="3000000"/>
+            </a:lightRig>
+          </a:scene3d>
+          <a:sp3d extrusionH="254000" contourW="19050">
+            <a:bevelT w="82550" h="44450" prst="angle"/>
+            <a:bevelB w="82550" h="44450" prst="angle"/>
+            <a:contourClr>
+              <a:srgbClr val="FFFFFF"/>
+            </a:contourClr>
+          </a:sp3d>
+        </p:spPr>
+        <p:txBody>
+          <a:bodyPr/>
+          <a:lstStyle>
+            <a:lvl1pPr algn="ctr" rtl="0" fontAlgn="base">
+              <a:spcBef>
+                <a:spcPct val="0"/>
+              </a:spcBef>
+              <a:spcAft>
+                <a:spcPct val="0"/>
+              </a:spcAft>
+              <a:defRPr sz="4400" kern="1200">
+                <a:solidFill>
+                  <a:schemeClr val="tx2"/>
+                </a:solidFill>
+                <a:latin typeface="+mj-lt"/>
+                <a:ea typeface="+mj-ea"/>
+                <a:cs typeface="+mj-cs"/>
+              </a:defRPr>
+            </a:lvl1pPr>
+            <a:lvl2pPr algn="ctr" rtl="0" fontAlgn="base">
+              <a:spcBef>
+                <a:spcPct val="0"/>
+              </a:spcBef>
+              <a:spcAft>
+                <a:spcPct val="0"/>
+              </a:spcAft>
+              <a:defRPr sz="4400">
+                <a:solidFill>
+                  <a:schemeClr val="tx2"/>
+                </a:solidFill>
+                <a:latin typeface="Times New Roman" panose="02020603050405020304" pitchFamily="18" charset="0"/>
+              </a:defRPr>
+            </a:lvl2pPr>
+            <a:lvl3pPr algn="ctr" rtl="0" fontAlgn="base">
+              <a:spcBef>
+                <a:spcPct val="0"/>
+              </a:spcBef>
+              <a:spcAft>
+                <a:spcPct val="0"/>
+              </a:spcAft>
+              <a:defRPr sz="4400">
+                <a:solidFill>
+                  <a:schemeClr val="tx2"/>
+                </a:solidFill>
+                <a:latin typeface="Times New Roman" panose="02020603050405020304" pitchFamily="18" charset="0"/>
+              </a:defRPr>
+            </a:lvl3pPr>
+            <a:lvl4pPr algn="ctr" rtl="0" fontAlgn="base">
+              <a:spcBef>
+                <a:spcPct val="0"/>
+              </a:spcBef>
+              <a:spcAft>
+                <a:spcPct val="0"/>
+              </a:spcAft>
+              <a:defRPr sz="4400">
+                <a:solidFill>
+                  <a:schemeClr val="tx2"/>
+                </a:solidFill>
+                <a:latin typeface="Times New Roman" panose="02020603050405020304" pitchFamily="18" charset="0"/>
+              </a:defRPr>
+            </a:lvl4pPr>
+            <a:lvl5pPr algn="ctr" rtl="0" fontAlgn="base">
+              <a:spcBef>
+                <a:spcPct val="0"/>
+              </a:spcBef>
+              <a:spcAft>
+                <a:spcPct val="0"/>
+              </a:spcAft>
+              <a:defRPr sz="4400">
+                <a:solidFill>
+                  <a:schemeClr val="tx2"/>
+                </a:solidFill>
+                <a:latin typeface="Times New Roman" panose="02020603050405020304" pitchFamily="18" charset="0"/>
+              </a:defRPr>
+            </a:lvl5pPr>
+            <a:lvl6pPr marL="457200" algn="ctr" rtl="0" fontAlgn="base">
+              <a:spcBef>
+                <a:spcPct val="0"/>
+              </a:spcBef>
+              <a:spcAft>
+                <a:spcPct val="0"/>
+              </a:spcAft>
+              <a:defRPr sz="4400">
+                <a:solidFill>
+                  <a:schemeClr val="tx2"/>
+                </a:solidFill>
+                <a:latin typeface="Times New Roman" panose="02020603050405020304" pitchFamily="18" charset="0"/>
+              </a:defRPr>
+            </a:lvl6pPr>
+            <a:lvl7pPr marL="914400" algn="ctr" rtl="0" fontAlgn="base">
+              <a:spcBef>
+                <a:spcPct val="0"/>
+              </a:spcBef>
+              <a:spcAft>
+                <a:spcPct val="0"/>
+              </a:spcAft>
+              <a:defRPr sz="4400">
+                <a:solidFill>
+                  <a:schemeClr val="tx2"/>
+                </a:solidFill>
+                <a:latin typeface="Times New Roman" panose="02020603050405020304" pitchFamily="18" charset="0"/>
+              </a:defRPr>
+            </a:lvl7pPr>
+            <a:lvl8pPr marL="1371600" algn="ctr" rtl="0" fontAlgn="base">
+              <a:spcBef>
+                <a:spcPct val="0"/>
+              </a:spcBef>
+              <a:spcAft>
+                <a:spcPct val="0"/>
+              </a:spcAft>
+              <a:defRPr sz="4400">
+                <a:solidFill>
+                  <a:schemeClr val="tx2"/>
+                </a:solidFill>
+                <a:latin typeface="Times New Roman" panose="02020603050405020304" pitchFamily="18" charset="0"/>
+              </a:defRPr>
+            </a:lvl8pPr>
+            <a:lvl9pPr marL="1828800" algn="ctr" rtl="0" fontAlgn="base">
+              <a:spcBef>
+                <a:spcPct val="0"/>
+              </a:spcBef>
+              <a:spcAft>
+                <a:spcPct val="0"/>
+              </a:spcAft>
+              <a:defRPr sz="4400">
+                <a:solidFill>
+                  <a:schemeClr val="tx2"/>
+                </a:solidFill>
+                <a:latin typeface="Times New Roman" panose="02020603050405020304" pitchFamily="18" charset="0"/>
+              </a:defRPr>
+            </a:lvl9pPr>
+          </a:lstStyle>
+          <a:p>
+            <a:r>
+              <a:rPr lang="en-US" sz="6000" dirty="0">
+                <a:solidFill>
+                  <a:srgbClr val="7030A0"/>
+                </a:solidFill>
+                <a:latin typeface="Abadi" panose="020B0604020104020204" pitchFamily="34" charset="0"/>
+              </a:rPr>
+              <a:t>Private Methods</a:t>
+            </a:r>
+          </a:p>
+        </p:txBody>
+      </p:sp>
+      <p:sp>
+        <p:nvSpPr>
+          <p:cNvPr id="6" name="Rectangle 7">
+            <a:extLst>
+              <a:ext uri="{FF2B5EF4-FFF2-40B4-BE49-F238E27FC236}">
+                <a16:creationId xmlns:a16="http://schemas.microsoft.com/office/drawing/2014/main" id="{8ACF41C9-72A6-A3D3-9881-F8CF2FFCB9C3}"/>
+              </a:ext>
+            </a:extLst>
+          </p:cNvPr>
+          <p:cNvSpPr>
+            <a:spLocks noChangeArrowheads="1"/>
+          </p:cNvSpPr>
+          <p:nvPr/>
+        </p:nvSpPr>
+        <p:spPr bwMode="auto">
+          <a:xfrm>
+            <a:off x="478971" y="1669699"/>
+            <a:ext cx="8186058" cy="4052007"/>
+          </a:xfrm>
+          <a:prstGeom prst="rect">
+            <a:avLst/>
+          </a:prstGeom>
+          <a:noFill/>
+          <a:ln>
+            <a:noFill/>
+          </a:ln>
+          <a:effectLst/>
+          <a:extLst>
+            <a:ext uri="{909E8E84-426E-40DD-AFC4-6F175D3DCCD1}">
+              <a14:hiddenFill xmlns:a14="http://schemas.microsoft.com/office/drawing/2010/main">
+                <a:solidFill>
+                  <a:schemeClr val="accent1"/>
+                </a:solidFill>
+              </a14:hiddenFill>
+            </a:ext>
+            <a:ext uri="{91240B29-F687-4F45-9708-019B960494DF}">
+              <a14:hiddenLine xmlns:a14="http://schemas.microsoft.com/office/drawing/2010/main" w="9525">
+                <a:solidFill>
+                  <a:schemeClr val="tx1"/>
+                </a:solidFill>
+                <a:miter lim="800000"/>
+                <a:headEnd/>
+                <a:tailEnd/>
+              </a14:hiddenLine>
+            </a:ext>
+            <a:ext uri="{AF507438-7753-43E0-B8FC-AC1667EBCBE1}">
+              <a14:hiddenEffects xmlns:a14="http://schemas.microsoft.com/office/drawing/2010/main">
+                <a:effectLst>
+                  <a:outerShdw dist="35921" dir="2700000" algn="ctr" rotWithShape="0">
+                    <a:schemeClr val="bg2"/>
+                  </a:outerShdw>
+                </a:effectLst>
+              </a14:hiddenEffects>
+            </a:ext>
+          </a:extLst>
+        </p:spPr>
+        <p:txBody>
+          <a:bodyPr vert="horz" wrap="square" lIns="91440" tIns="45720" rIns="91440" bIns="45720" numCol="1" anchor="ctr" anchorCtr="0" compatLnSpc="1">
+            <a:prstTxWarp prst="textNoShape">
+              <a:avLst/>
+            </a:prstTxWarp>
+            <a:spAutoFit/>
+          </a:bodyPr>
+          <a:lstStyle/>
+          <a:p>
+            <a:pPr marL="0" marR="0" lvl="0" indent="0" algn="l" defTabSz="914400" rtl="0" eaLnBrk="0" fontAlgn="base" latinLnBrk="0" hangingPunct="0">
+              <a:lnSpc>
+                <a:spcPct val="114000"/>
+              </a:lnSpc>
+              <a:spcBef>
+                <a:spcPct val="0"/>
+              </a:spcBef>
+              <a:spcAft>
+                <a:spcPts val="600"/>
+              </a:spcAft>
+              <a:buClrTx/>
+              <a:buSzTx/>
+              <a:buFontTx/>
+              <a:buNone/>
+              <a:tabLst/>
+            </a:pPr>
+            <a:r>
+              <a:rPr kumimoji="0" lang="en-US" altLang="en-US" sz="3200" b="1" i="0" u="none" strike="noStrike" cap="none" normalizeH="0" baseline="0" dirty="0">
+                <a:ln>
+                  <a:noFill/>
+                </a:ln>
+                <a:solidFill>
+                  <a:schemeClr val="tx1"/>
+                </a:solidFill>
+                <a:effectLst/>
+                <a:latin typeface="Arial" panose="020B0604020202020204" pitchFamily="34" charset="0"/>
+              </a:rPr>
+              <a:t>​Which is not a valid method declaration?</a:t>
+            </a:r>
+          </a:p>
+          <a:p>
+            <a:pPr marL="0" marR="0" lvl="0" indent="0" algn="l" defTabSz="914400" rtl="0" eaLnBrk="0" fontAlgn="base" latinLnBrk="0" hangingPunct="0">
+              <a:lnSpc>
+                <a:spcPct val="114000"/>
+              </a:lnSpc>
+              <a:spcBef>
+                <a:spcPct val="0"/>
+              </a:spcBef>
+              <a:spcAft>
+                <a:spcPct val="0"/>
+              </a:spcAft>
+              <a:buClrTx/>
+              <a:buSzTx/>
+              <a:buFontTx/>
+              <a:buNone/>
+              <a:tabLst/>
+            </a:pPr>
+            <a:r>
+              <a:rPr kumimoji="0" lang="en-US" altLang="en-US" sz="3200" b="0" i="0" u="none" strike="noStrike" cap="none" normalizeH="0" baseline="0" dirty="0">
+                <a:ln>
+                  <a:noFill/>
+                </a:ln>
+                <a:solidFill>
+                  <a:schemeClr val="tx1"/>
+                </a:solidFill>
+                <a:effectLst/>
+                <a:latin typeface="Arial" panose="020B0604020202020204" pitchFamily="34" charset="0"/>
+              </a:rPr>
+              <a:t>public abstract void </a:t>
+            </a:r>
+            <a:r>
+              <a:rPr kumimoji="0" lang="en-US" altLang="en-US" sz="3200" b="0" i="0" u="none" strike="noStrike" cap="none" normalizeH="0" baseline="0" dirty="0" err="1">
+                <a:ln>
+                  <a:noFill/>
+                </a:ln>
+                <a:solidFill>
+                  <a:schemeClr val="tx1"/>
+                </a:solidFill>
+                <a:effectLst/>
+                <a:latin typeface="Arial" panose="020B0604020202020204" pitchFamily="34" charset="0"/>
+              </a:rPr>
+              <a:t>someMethod</a:t>
+            </a:r>
+            <a:r>
+              <a:rPr kumimoji="0" lang="en-US" altLang="en-US" sz="3200" b="0" i="0" u="none" strike="noStrike" cap="none" normalizeH="0" baseline="0" dirty="0">
+                <a:ln>
+                  <a:noFill/>
+                </a:ln>
+                <a:solidFill>
+                  <a:schemeClr val="tx1"/>
+                </a:solidFill>
+                <a:effectLst/>
+                <a:latin typeface="Arial" panose="020B0604020202020204" pitchFamily="34" charset="0"/>
+              </a:rPr>
+              <a:t>() ;  </a:t>
+            </a:r>
+            <a:r>
+              <a:rPr kumimoji="0" lang="en-US" altLang="en-US" sz="1200" b="0" i="0" u="none" strike="noStrike" cap="none" normalizeH="0" baseline="0" dirty="0">
+                <a:ln>
+                  <a:noFill/>
+                </a:ln>
+                <a:solidFill>
+                  <a:schemeClr val="tx1"/>
+                </a:solidFill>
+                <a:effectLst/>
+                <a:latin typeface="Arial" panose="020B0604020202020204" pitchFamily="34" charset="0"/>
+              </a:rPr>
+              <a:t>     </a:t>
+            </a:r>
+            <a:endParaRPr kumimoji="0" lang="en-US" altLang="en-US" sz="3200" b="0" i="0" u="none" strike="noStrike" cap="none" normalizeH="0" baseline="0" dirty="0">
+              <a:ln>
+                <a:noFill/>
+              </a:ln>
+              <a:solidFill>
+                <a:schemeClr val="tx1"/>
+              </a:solidFill>
+              <a:effectLst/>
+              <a:latin typeface="Arial" panose="020B0604020202020204" pitchFamily="34" charset="0"/>
+            </a:endParaRPr>
+          </a:p>
+          <a:p>
+            <a:pPr marL="0" marR="0" lvl="0" indent="0" algn="l" defTabSz="914400" rtl="0" eaLnBrk="0" fontAlgn="base" latinLnBrk="0" hangingPunct="0">
+              <a:lnSpc>
+                <a:spcPct val="114000"/>
+              </a:lnSpc>
+              <a:spcBef>
+                <a:spcPct val="0"/>
+              </a:spcBef>
+              <a:spcAft>
+                <a:spcPct val="0"/>
+              </a:spcAft>
+              <a:buClrTx/>
+              <a:buSzTx/>
+              <a:buFontTx/>
+              <a:buNone/>
+              <a:tabLst/>
+            </a:pPr>
+            <a:r>
+              <a:rPr kumimoji="0" lang="en-US" altLang="en-US" sz="3200" b="0" i="0" u="none" strike="noStrike" cap="none" normalizeH="0" baseline="0" dirty="0">
+                <a:ln>
+                  <a:noFill/>
+                </a:ln>
+                <a:solidFill>
+                  <a:schemeClr val="tx1"/>
+                </a:solidFill>
+                <a:effectLst/>
+                <a:latin typeface="Arial" panose="020B0604020202020204" pitchFamily="34" charset="0"/>
+              </a:rPr>
+              <a:t>private abstract void </a:t>
+            </a:r>
+            <a:r>
+              <a:rPr kumimoji="0" lang="en-US" altLang="en-US" sz="3200" b="0" i="0" u="none" strike="noStrike" cap="none" normalizeH="0" baseline="0" dirty="0" err="1">
+                <a:ln>
+                  <a:noFill/>
+                </a:ln>
+                <a:solidFill>
+                  <a:schemeClr val="tx1"/>
+                </a:solidFill>
+                <a:effectLst/>
+                <a:latin typeface="Arial" panose="020B0604020202020204" pitchFamily="34" charset="0"/>
+              </a:rPr>
+              <a:t>someMethod</a:t>
+            </a:r>
+            <a:r>
+              <a:rPr kumimoji="0" lang="en-US" altLang="en-US" sz="3200" b="0" i="0" u="none" strike="noStrike" cap="none" normalizeH="0" baseline="0" dirty="0">
+                <a:ln>
+                  <a:noFill/>
+                </a:ln>
+                <a:solidFill>
+                  <a:schemeClr val="tx1"/>
+                </a:solidFill>
+                <a:effectLst/>
+                <a:latin typeface="Arial" panose="020B0604020202020204" pitchFamily="34" charset="0"/>
+              </a:rPr>
+              <a:t>() </a:t>
+            </a:r>
+            <a:r>
+              <a:rPr lang="en-US" altLang="en-US" sz="3200" dirty="0">
+                <a:latin typeface="Arial" panose="020B0604020202020204" pitchFamily="34" charset="0"/>
+              </a:rPr>
+              <a:t>;</a:t>
+            </a:r>
+            <a:r>
+              <a:rPr kumimoji="0" lang="en-US" altLang="en-US" sz="3200" b="0" i="0" u="none" strike="noStrike" cap="none" normalizeH="0" baseline="0" dirty="0">
+                <a:ln>
+                  <a:noFill/>
+                </a:ln>
+                <a:solidFill>
+                  <a:schemeClr val="tx1"/>
+                </a:solidFill>
+                <a:effectLst/>
+                <a:latin typeface="Arial" panose="020B0604020202020204" pitchFamily="34" charset="0"/>
+              </a:rPr>
+              <a:t>  </a:t>
+            </a:r>
+            <a:r>
+              <a:rPr kumimoji="0" lang="en-US" altLang="en-US" sz="1200" b="0" i="0" u="none" strike="noStrike" cap="none" normalizeH="0" baseline="0" dirty="0">
+                <a:ln>
+                  <a:noFill/>
+                </a:ln>
+                <a:solidFill>
+                  <a:schemeClr val="tx1"/>
+                </a:solidFill>
+                <a:effectLst/>
+                <a:latin typeface="Arial" panose="020B0604020202020204" pitchFamily="34" charset="0"/>
+              </a:rPr>
+              <a:t>     </a:t>
+            </a:r>
+            <a:endParaRPr kumimoji="0" lang="en-US" altLang="en-US" sz="3200" b="0" i="0" u="none" strike="noStrike" cap="none" normalizeH="0" baseline="0" dirty="0">
+              <a:ln>
+                <a:noFill/>
+              </a:ln>
+              <a:solidFill>
+                <a:schemeClr val="tx1"/>
+              </a:solidFill>
+              <a:effectLst/>
+              <a:latin typeface="Arial" panose="020B0604020202020204" pitchFamily="34" charset="0"/>
+            </a:endParaRPr>
+          </a:p>
+          <a:p>
+            <a:pPr marL="0" marR="0" lvl="0" indent="0" algn="l" defTabSz="914400" rtl="0" eaLnBrk="0" fontAlgn="base" latinLnBrk="0" hangingPunct="0">
+              <a:lnSpc>
+                <a:spcPct val="114000"/>
+              </a:lnSpc>
+              <a:spcBef>
+                <a:spcPct val="0"/>
+              </a:spcBef>
+              <a:spcAft>
+                <a:spcPct val="0"/>
+              </a:spcAft>
+              <a:buClrTx/>
+              <a:buSzTx/>
+              <a:buFontTx/>
+              <a:buNone/>
+              <a:tabLst/>
+            </a:pPr>
+            <a:r>
+              <a:rPr kumimoji="0" lang="en-US" altLang="en-US" sz="3200" b="0" i="0" u="none" strike="noStrike" cap="none" normalizeH="0" baseline="0" dirty="0">
+                <a:ln>
+                  <a:noFill/>
+                </a:ln>
+                <a:solidFill>
+                  <a:schemeClr val="tx1"/>
+                </a:solidFill>
+                <a:effectLst/>
+                <a:latin typeface="Arial" panose="020B0604020202020204" pitchFamily="34" charset="0"/>
+              </a:rPr>
+              <a:t>public default void </a:t>
+            </a:r>
+            <a:r>
+              <a:rPr kumimoji="0" lang="en-US" altLang="en-US" sz="3200" b="0" i="0" u="none" strike="noStrike" cap="none" normalizeH="0" baseline="0" dirty="0" err="1">
+                <a:ln>
+                  <a:noFill/>
+                </a:ln>
+                <a:solidFill>
+                  <a:schemeClr val="tx1"/>
+                </a:solidFill>
+                <a:effectLst/>
+                <a:latin typeface="Arial" panose="020B0604020202020204" pitchFamily="34" charset="0"/>
+              </a:rPr>
+              <a:t>someMethod</a:t>
+            </a:r>
+            <a:r>
+              <a:rPr kumimoji="0" lang="en-US" altLang="en-US" sz="3200" b="0" i="0" u="none" strike="noStrike" cap="none" normalizeH="0" baseline="0" dirty="0">
+                <a:ln>
+                  <a:noFill/>
+                </a:ln>
+                <a:solidFill>
+                  <a:schemeClr val="tx1"/>
+                </a:solidFill>
+                <a:effectLst/>
+                <a:latin typeface="Arial" panose="020B0604020202020204" pitchFamily="34" charset="0"/>
+              </a:rPr>
+              <a:t>() { }</a:t>
+            </a:r>
+          </a:p>
+          <a:p>
+            <a:pPr lvl="0" eaLnBrk="0" hangingPunct="0">
+              <a:lnSpc>
+                <a:spcPct val="114000"/>
+              </a:lnSpc>
+            </a:pPr>
+            <a:r>
+              <a:rPr kumimoji="0" lang="en-US" altLang="en-US" sz="3200" b="0" i="0" u="none" strike="noStrike" cap="none" normalizeH="0" baseline="0" dirty="0">
+                <a:ln>
+                  <a:noFill/>
+                </a:ln>
+                <a:solidFill>
+                  <a:schemeClr val="tx1"/>
+                </a:solidFill>
+                <a:effectLst/>
+                <a:latin typeface="Arial" panose="020B0604020202020204" pitchFamily="34" charset="0"/>
+              </a:rPr>
+              <a:t>private void </a:t>
+            </a:r>
+            <a:r>
+              <a:rPr kumimoji="0" lang="en-US" altLang="en-US" sz="3200" b="0" i="0" u="none" strike="noStrike" cap="none" normalizeH="0" baseline="0" dirty="0" err="1">
+                <a:ln>
+                  <a:noFill/>
+                </a:ln>
+                <a:solidFill>
+                  <a:schemeClr val="tx1"/>
+                </a:solidFill>
+                <a:effectLst/>
+                <a:latin typeface="Arial" panose="020B0604020202020204" pitchFamily="34" charset="0"/>
+              </a:rPr>
+              <a:t>someMethod</a:t>
+            </a:r>
+            <a:r>
+              <a:rPr kumimoji="0" lang="en-US" altLang="en-US" sz="3200" b="0" i="0" u="none" strike="noStrike" cap="none" normalizeH="0" baseline="0" dirty="0">
+                <a:ln>
+                  <a:noFill/>
+                </a:ln>
+                <a:solidFill>
+                  <a:schemeClr val="tx1"/>
+                </a:solidFill>
+                <a:effectLst/>
+                <a:latin typeface="Arial" panose="020B0604020202020204" pitchFamily="34" charset="0"/>
+              </a:rPr>
+              <a:t>() </a:t>
+            </a:r>
+            <a:r>
+              <a:rPr lang="en-US" altLang="en-US" sz="3200" dirty="0">
+                <a:latin typeface="Arial" panose="020B0604020202020204" pitchFamily="34" charset="0"/>
+              </a:rPr>
+              <a:t> { }</a:t>
+            </a:r>
+            <a:endParaRPr kumimoji="0" lang="en-US" altLang="en-US" sz="3200" b="0" i="0" u="none" strike="noStrike" cap="none" normalizeH="0" baseline="0" dirty="0">
+              <a:ln>
+                <a:noFill/>
+              </a:ln>
+              <a:solidFill>
+                <a:schemeClr val="tx1"/>
+              </a:solidFill>
+              <a:effectLst/>
+              <a:latin typeface="Arial" panose="020B0604020202020204" pitchFamily="34" charset="0"/>
+            </a:endParaRPr>
+          </a:p>
+          <a:p>
+            <a:pPr lvl="0" eaLnBrk="0" hangingPunct="0">
+              <a:lnSpc>
+                <a:spcPct val="114000"/>
+              </a:lnSpc>
+            </a:pPr>
+            <a:r>
+              <a:rPr kumimoji="0" lang="en-US" altLang="en-US" sz="3200" b="0" i="0" u="none" strike="noStrike" cap="none" normalizeH="0" baseline="0" dirty="0">
+                <a:ln>
+                  <a:noFill/>
+                </a:ln>
+                <a:solidFill>
+                  <a:schemeClr val="tx1"/>
+                </a:solidFill>
+                <a:effectLst/>
+                <a:latin typeface="Arial" panose="020B0604020202020204" pitchFamily="34" charset="0"/>
+              </a:rPr>
+              <a:t>public static void </a:t>
+            </a:r>
+            <a:r>
+              <a:rPr kumimoji="0" lang="en-US" altLang="en-US" sz="3200" b="0" i="0" u="none" strike="noStrike" cap="none" normalizeH="0" baseline="0" dirty="0" err="1">
+                <a:ln>
+                  <a:noFill/>
+                </a:ln>
+                <a:solidFill>
+                  <a:schemeClr val="tx1"/>
+                </a:solidFill>
+                <a:effectLst/>
+                <a:latin typeface="Arial" panose="020B0604020202020204" pitchFamily="34" charset="0"/>
+              </a:rPr>
+              <a:t>someMethod</a:t>
+            </a:r>
+            <a:r>
+              <a:rPr kumimoji="0" lang="en-US" altLang="en-US" sz="3200" b="0" i="0" u="none" strike="noStrike" cap="none" normalizeH="0" baseline="0" dirty="0">
+                <a:ln>
+                  <a:noFill/>
+                </a:ln>
+                <a:solidFill>
+                  <a:schemeClr val="tx1"/>
+                </a:solidFill>
+                <a:effectLst/>
+                <a:latin typeface="Arial" panose="020B0604020202020204" pitchFamily="34" charset="0"/>
+              </a:rPr>
+              <a:t>() </a:t>
+            </a:r>
+            <a:r>
+              <a:rPr lang="en-US" altLang="en-US" sz="3200" dirty="0">
+                <a:latin typeface="Arial" panose="020B0604020202020204" pitchFamily="34" charset="0"/>
+              </a:rPr>
+              <a:t> { }</a:t>
+            </a:r>
+            <a:endParaRPr kumimoji="0" lang="en-US" altLang="en-US" sz="3200" b="0" i="0" u="none" strike="noStrike" cap="none" normalizeH="0" baseline="0" dirty="0">
+              <a:ln>
+                <a:noFill/>
+              </a:ln>
+              <a:solidFill>
+                <a:schemeClr val="tx1"/>
+              </a:solidFill>
+              <a:effectLst/>
+              <a:latin typeface="Arial" panose="020B0604020202020204" pitchFamily="34" charset="0"/>
+            </a:endParaRPr>
+          </a:p>
+          <a:p>
+            <a:pPr lvl="0" eaLnBrk="0" hangingPunct="0">
+              <a:lnSpc>
+                <a:spcPct val="114000"/>
+              </a:lnSpc>
+            </a:pPr>
+            <a:r>
+              <a:rPr kumimoji="0" lang="en-US" altLang="en-US" sz="3200" b="0" i="0" u="none" strike="noStrike" cap="none" normalizeH="0" baseline="0" dirty="0">
+                <a:ln>
+                  <a:noFill/>
+                </a:ln>
+                <a:solidFill>
+                  <a:schemeClr val="tx1"/>
+                </a:solidFill>
+                <a:effectLst/>
+                <a:latin typeface="Arial" panose="020B0604020202020204" pitchFamily="34" charset="0"/>
+              </a:rPr>
+              <a:t>private static void </a:t>
+            </a:r>
+            <a:r>
+              <a:rPr kumimoji="0" lang="en-US" altLang="en-US" sz="3200" b="0" i="0" u="none" strike="noStrike" cap="none" normalizeH="0" baseline="0" dirty="0" err="1">
+                <a:ln>
+                  <a:noFill/>
+                </a:ln>
+                <a:solidFill>
+                  <a:schemeClr val="tx1"/>
+                </a:solidFill>
+                <a:effectLst/>
+                <a:latin typeface="Arial" panose="020B0604020202020204" pitchFamily="34" charset="0"/>
+              </a:rPr>
+              <a:t>someMethod</a:t>
+            </a:r>
+            <a:r>
+              <a:rPr kumimoji="0" lang="en-US" altLang="en-US" sz="3200" b="0" i="0" u="none" strike="noStrike" cap="none" normalizeH="0" baseline="0" dirty="0">
+                <a:ln>
+                  <a:noFill/>
+                </a:ln>
+                <a:solidFill>
+                  <a:schemeClr val="tx1"/>
+                </a:solidFill>
+                <a:effectLst/>
+                <a:latin typeface="Arial" panose="020B0604020202020204" pitchFamily="34" charset="0"/>
+              </a:rPr>
+              <a:t>() </a:t>
+            </a:r>
+            <a:r>
+              <a:rPr lang="en-US" altLang="en-US" sz="3200" dirty="0">
+                <a:latin typeface="Arial" panose="020B0604020202020204" pitchFamily="34" charset="0"/>
+              </a:rPr>
+              <a:t> { }</a:t>
+            </a:r>
+            <a:endParaRPr kumimoji="0" lang="en-US" altLang="en-US" sz="3200" b="0" i="0" u="none" strike="noStrike" cap="none" normalizeH="0" baseline="0" dirty="0">
+              <a:ln>
+                <a:noFill/>
+              </a:ln>
+              <a:solidFill>
+                <a:schemeClr val="tx1"/>
+              </a:solidFill>
+              <a:effectLst/>
+              <a:latin typeface="Arial" panose="020B0604020202020204" pitchFamily="34" charset="0"/>
+            </a:endParaRPr>
+          </a:p>
+        </p:txBody>
+      </p:sp>
+      <p:pic>
+        <p:nvPicPr>
+          <p:cNvPr id="1032" name="Picture 8">
+            <a:extLst>
+              <a:ext uri="{FF2B5EF4-FFF2-40B4-BE49-F238E27FC236}">
+                <a16:creationId xmlns:a16="http://schemas.microsoft.com/office/drawing/2014/main" id="{70A4234A-5D2C-CB06-4AA4-BFC057F5C6CD}"/>
+              </a:ext>
+            </a:extLst>
+          </p:cNvPr>
+          <p:cNvPicPr>
+            <a:picLocks noChangeAspect="1" noChangeArrowheads="1"/>
+          </p:cNvPicPr>
+          <p:nvPr/>
+        </p:nvPicPr>
+        <p:blipFill>
+          <a:blip r:embed="rId3">
+            <a:extLst>
+              <a:ext uri="{28A0092B-C50C-407E-A947-70E740481C1C}">
+                <a14:useLocalDpi xmlns:a14="http://schemas.microsoft.com/office/drawing/2010/main" val="0"/>
+              </a:ext>
+            </a:extLst>
+          </a:blip>
+          <a:srcRect/>
+          <a:stretch>
+            <a:fillRect/>
+          </a:stretch>
+        </p:blipFill>
+        <p:spPr bwMode="auto">
+          <a:xfrm>
+            <a:off x="4838700" y="-822325"/>
+            <a:ext cx="142875" cy="142875"/>
+          </a:xfrm>
+          <a:prstGeom prst="rect">
+            <a:avLst/>
+          </a:prstGeom>
+          <a:noFill/>
+          <a:extLst>
+            <a:ext uri="{909E8E84-426E-40DD-AFC4-6F175D3DCCD1}">
+              <a14:hiddenFill xmlns:a14="http://schemas.microsoft.com/office/drawing/2010/main">
+                <a:solidFill>
+                  <a:srgbClr val="FFFFFF"/>
+                </a:solidFill>
+              </a14:hiddenFill>
+            </a:ext>
+          </a:extLst>
+        </p:spPr>
+      </p:pic>
+      <p:pic>
+        <p:nvPicPr>
+          <p:cNvPr id="1033" name="Picture 9">
+            <a:extLst>
+              <a:ext uri="{FF2B5EF4-FFF2-40B4-BE49-F238E27FC236}">
+                <a16:creationId xmlns:a16="http://schemas.microsoft.com/office/drawing/2014/main" id="{FBF62D8C-F155-6741-A907-7F6F11380255}"/>
+              </a:ext>
+            </a:extLst>
+          </p:cNvPr>
+          <p:cNvPicPr>
+            <a:picLocks noChangeAspect="1" noChangeArrowheads="1"/>
+          </p:cNvPicPr>
+          <p:nvPr/>
+        </p:nvPicPr>
+        <p:blipFill>
+          <a:blip r:embed="rId3">
+            <a:extLst>
+              <a:ext uri="{28A0092B-C50C-407E-A947-70E740481C1C}">
+                <a14:useLocalDpi xmlns:a14="http://schemas.microsoft.com/office/drawing/2010/main" val="0"/>
+              </a:ext>
+            </a:extLst>
+          </a:blip>
+          <a:srcRect/>
+          <a:stretch>
+            <a:fillRect/>
+          </a:stretch>
+        </p:blipFill>
+        <p:spPr bwMode="auto">
+          <a:xfrm>
+            <a:off x="4927600" y="-549275"/>
+            <a:ext cx="142875" cy="142875"/>
+          </a:xfrm>
+          <a:prstGeom prst="rect">
+            <a:avLst/>
+          </a:prstGeom>
+          <a:noFill/>
+          <a:extLst>
+            <a:ext uri="{909E8E84-426E-40DD-AFC4-6F175D3DCCD1}">
+              <a14:hiddenFill xmlns:a14="http://schemas.microsoft.com/office/drawing/2010/main">
+                <a:solidFill>
+                  <a:srgbClr val="FFFFFF"/>
+                </a:solidFill>
+              </a14:hiddenFill>
+            </a:ext>
+          </a:extLst>
+        </p:spPr>
+      </p:pic>
+      <p:sp>
+        <p:nvSpPr>
+          <p:cNvPr id="7" name="Rectangle 7">
+            <a:extLst>
+              <a:ext uri="{FF2B5EF4-FFF2-40B4-BE49-F238E27FC236}">
+                <a16:creationId xmlns:a16="http://schemas.microsoft.com/office/drawing/2014/main" id="{7F8BBDEF-9ABA-6540-4DDE-E4D1B527D3A5}"/>
+              </a:ext>
+            </a:extLst>
+          </p:cNvPr>
+          <p:cNvSpPr>
+            <a:spLocks noChangeArrowheads="1"/>
+          </p:cNvSpPr>
+          <p:nvPr/>
+        </p:nvSpPr>
+        <p:spPr bwMode="auto">
+          <a:xfrm>
+            <a:off x="478971" y="1669699"/>
+            <a:ext cx="8186058" cy="4052007"/>
+          </a:xfrm>
+          <a:prstGeom prst="rect">
+            <a:avLst/>
+          </a:prstGeom>
+          <a:noFill/>
+          <a:ln>
+            <a:noFill/>
+          </a:ln>
+          <a:effectLst/>
+          <a:extLst>
+            <a:ext uri="{909E8E84-426E-40DD-AFC4-6F175D3DCCD1}">
+              <a14:hiddenFill xmlns:a14="http://schemas.microsoft.com/office/drawing/2010/main">
+                <a:solidFill>
+                  <a:schemeClr val="accent1"/>
+                </a:solidFill>
+              </a14:hiddenFill>
+            </a:ext>
+            <a:ext uri="{91240B29-F687-4F45-9708-019B960494DF}">
+              <a14:hiddenLine xmlns:a14="http://schemas.microsoft.com/office/drawing/2010/main" w="9525">
+                <a:solidFill>
+                  <a:schemeClr val="tx1"/>
+                </a:solidFill>
+                <a:miter lim="800000"/>
+                <a:headEnd/>
+                <a:tailEnd/>
+              </a14:hiddenLine>
+            </a:ext>
+            <a:ext uri="{AF507438-7753-43E0-B8FC-AC1667EBCBE1}">
+              <a14:hiddenEffects xmlns:a14="http://schemas.microsoft.com/office/drawing/2010/main">
+                <a:effectLst>
+                  <a:outerShdw dist="35921" dir="2700000" algn="ctr" rotWithShape="0">
+                    <a:schemeClr val="bg2"/>
+                  </a:outerShdw>
+                </a:effectLst>
+              </a14:hiddenEffects>
+            </a:ext>
+          </a:extLst>
+        </p:spPr>
+        <p:txBody>
+          <a:bodyPr vert="horz" wrap="square" lIns="91440" tIns="45720" rIns="91440" bIns="45720" numCol="1" anchor="ctr" anchorCtr="0" compatLnSpc="1">
+            <a:prstTxWarp prst="textNoShape">
+              <a:avLst/>
+            </a:prstTxWarp>
+            <a:spAutoFit/>
+          </a:bodyPr>
+          <a:lstStyle/>
+          <a:p>
+            <a:pPr marL="0" marR="0" lvl="0" indent="0" algn="l" defTabSz="914400" rtl="0" eaLnBrk="0" fontAlgn="base" latinLnBrk="0" hangingPunct="0">
+              <a:lnSpc>
+                <a:spcPct val="114000"/>
+              </a:lnSpc>
+              <a:spcBef>
+                <a:spcPct val="0"/>
+              </a:spcBef>
+              <a:spcAft>
+                <a:spcPts val="600"/>
+              </a:spcAft>
+              <a:buClrTx/>
+              <a:buSzTx/>
+              <a:buFontTx/>
+              <a:buNone/>
+              <a:tabLst/>
+            </a:pPr>
+            <a:r>
+              <a:rPr kumimoji="0" lang="en-US" altLang="en-US" sz="3200" b="1" i="0" u="none" strike="noStrike" cap="none" normalizeH="0" baseline="0" dirty="0">
+                <a:ln>
+                  <a:noFill/>
+                </a:ln>
+                <a:solidFill>
+                  <a:schemeClr val="tx1"/>
+                </a:solidFill>
+                <a:effectLst/>
+                <a:latin typeface="Arial" panose="020B0604020202020204" pitchFamily="34" charset="0"/>
+              </a:rPr>
+              <a:t>​Which is not a valid method declaration?</a:t>
+            </a:r>
+          </a:p>
+          <a:p>
+            <a:pPr marL="0" marR="0" lvl="0" indent="0" algn="l" defTabSz="914400" rtl="0" eaLnBrk="0" fontAlgn="base" latinLnBrk="0" hangingPunct="0">
+              <a:lnSpc>
+                <a:spcPct val="114000"/>
+              </a:lnSpc>
+              <a:spcBef>
+                <a:spcPct val="0"/>
+              </a:spcBef>
+              <a:spcAft>
+                <a:spcPct val="0"/>
+              </a:spcAft>
+              <a:buClrTx/>
+              <a:buSzTx/>
+              <a:buFontTx/>
+              <a:buNone/>
+              <a:tabLst/>
+            </a:pPr>
+            <a:r>
+              <a:rPr kumimoji="0" lang="en-US" altLang="en-US" sz="3200" b="0" i="0" u="none" strike="noStrike" cap="none" normalizeH="0" baseline="0" dirty="0">
+                <a:ln>
+                  <a:noFill/>
+                </a:ln>
+                <a:solidFill>
+                  <a:schemeClr val="tx1"/>
+                </a:solidFill>
+                <a:effectLst/>
+                <a:latin typeface="Arial" panose="020B0604020202020204" pitchFamily="34" charset="0"/>
+              </a:rPr>
+              <a:t>public abstract void </a:t>
+            </a:r>
+            <a:r>
+              <a:rPr kumimoji="0" lang="en-US" altLang="en-US" sz="3200" b="0" i="0" u="none" strike="noStrike" cap="none" normalizeH="0" baseline="0" dirty="0" err="1">
+                <a:ln>
+                  <a:noFill/>
+                </a:ln>
+                <a:solidFill>
+                  <a:schemeClr val="tx1"/>
+                </a:solidFill>
+                <a:effectLst/>
+                <a:latin typeface="Arial" panose="020B0604020202020204" pitchFamily="34" charset="0"/>
+              </a:rPr>
+              <a:t>someMethod</a:t>
+            </a:r>
+            <a:r>
+              <a:rPr kumimoji="0" lang="en-US" altLang="en-US" sz="3200" b="0" i="0" u="none" strike="noStrike" cap="none" normalizeH="0" baseline="0" dirty="0">
+                <a:ln>
+                  <a:noFill/>
+                </a:ln>
+                <a:solidFill>
+                  <a:schemeClr val="tx1"/>
+                </a:solidFill>
+                <a:effectLst/>
+                <a:latin typeface="Arial" panose="020B0604020202020204" pitchFamily="34" charset="0"/>
+              </a:rPr>
+              <a:t>() ;  </a:t>
+            </a:r>
+            <a:r>
+              <a:rPr kumimoji="0" lang="en-US" altLang="en-US" sz="1200" b="0" i="0" u="none" strike="noStrike" cap="none" normalizeH="0" baseline="0" dirty="0">
+                <a:ln>
+                  <a:noFill/>
+                </a:ln>
+                <a:solidFill>
+                  <a:schemeClr val="tx1"/>
+                </a:solidFill>
+                <a:effectLst/>
+                <a:latin typeface="Arial" panose="020B0604020202020204" pitchFamily="34" charset="0"/>
+              </a:rPr>
+              <a:t>     </a:t>
+            </a:r>
+            <a:endParaRPr kumimoji="0" lang="en-US" altLang="en-US" sz="3200" b="0" i="0" u="none" strike="noStrike" cap="none" normalizeH="0" baseline="0" dirty="0">
+              <a:ln>
+                <a:noFill/>
+              </a:ln>
+              <a:solidFill>
+                <a:schemeClr val="tx1"/>
+              </a:solidFill>
+              <a:effectLst/>
+              <a:latin typeface="Arial" panose="020B0604020202020204" pitchFamily="34" charset="0"/>
+            </a:endParaRPr>
+          </a:p>
+          <a:p>
+            <a:pPr marL="0" marR="0" lvl="0" indent="0" algn="l" defTabSz="914400" rtl="0" eaLnBrk="0" fontAlgn="base" latinLnBrk="0" hangingPunct="0">
+              <a:lnSpc>
+                <a:spcPct val="114000"/>
+              </a:lnSpc>
+              <a:spcBef>
+                <a:spcPct val="0"/>
+              </a:spcBef>
+              <a:spcAft>
+                <a:spcPct val="0"/>
+              </a:spcAft>
+              <a:buClrTx/>
+              <a:buSzTx/>
+              <a:buFontTx/>
+              <a:buNone/>
+              <a:tabLst/>
+            </a:pPr>
+            <a:r>
+              <a:rPr kumimoji="0" lang="en-US" altLang="en-US" sz="3200" b="0" i="0" u="none" strike="noStrike" cap="none" normalizeH="0" baseline="0" dirty="0">
+                <a:ln>
+                  <a:noFill/>
+                </a:ln>
+                <a:solidFill>
+                  <a:srgbClr val="C00000"/>
+                </a:solidFill>
+                <a:effectLst/>
+                <a:latin typeface="Arial" panose="020B0604020202020204" pitchFamily="34" charset="0"/>
+              </a:rPr>
+              <a:t>private abstract void </a:t>
+            </a:r>
+            <a:r>
+              <a:rPr kumimoji="0" lang="en-US" altLang="en-US" sz="3200" b="0" i="0" u="none" strike="noStrike" cap="none" normalizeH="0" baseline="0" dirty="0" err="1">
+                <a:ln>
+                  <a:noFill/>
+                </a:ln>
+                <a:solidFill>
+                  <a:srgbClr val="C00000"/>
+                </a:solidFill>
+                <a:effectLst/>
+                <a:latin typeface="Arial" panose="020B0604020202020204" pitchFamily="34" charset="0"/>
+              </a:rPr>
+              <a:t>someMethod</a:t>
+            </a:r>
+            <a:r>
+              <a:rPr kumimoji="0" lang="en-US" altLang="en-US" sz="3200" b="0" i="0" u="none" strike="noStrike" cap="none" normalizeH="0" baseline="0" dirty="0">
+                <a:ln>
+                  <a:noFill/>
+                </a:ln>
+                <a:solidFill>
+                  <a:srgbClr val="C00000"/>
+                </a:solidFill>
+                <a:effectLst/>
+                <a:latin typeface="Arial" panose="020B0604020202020204" pitchFamily="34" charset="0"/>
+              </a:rPr>
+              <a:t>() </a:t>
+            </a:r>
+            <a:r>
+              <a:rPr lang="en-US" altLang="en-US" sz="3200" dirty="0">
+                <a:solidFill>
+                  <a:srgbClr val="C00000"/>
+                </a:solidFill>
+                <a:latin typeface="Arial" panose="020B0604020202020204" pitchFamily="34" charset="0"/>
+              </a:rPr>
+              <a:t>;</a:t>
+            </a:r>
+            <a:r>
+              <a:rPr kumimoji="0" lang="en-US" altLang="en-US" sz="3200" b="0" i="0" u="none" strike="noStrike" cap="none" normalizeH="0" baseline="0" dirty="0">
+                <a:ln>
+                  <a:noFill/>
+                </a:ln>
+                <a:solidFill>
+                  <a:srgbClr val="C00000"/>
+                </a:solidFill>
+                <a:effectLst/>
+                <a:latin typeface="Arial" panose="020B0604020202020204" pitchFamily="34" charset="0"/>
+              </a:rPr>
+              <a:t> </a:t>
+            </a:r>
+            <a:r>
+              <a:rPr kumimoji="0" lang="en-US" altLang="en-US" sz="1200" b="0" i="0" u="none" strike="noStrike" cap="none" normalizeH="0" baseline="0" dirty="0">
+                <a:ln>
+                  <a:noFill/>
+                </a:ln>
+                <a:solidFill>
+                  <a:srgbClr val="C00000"/>
+                </a:solidFill>
+                <a:effectLst/>
+                <a:latin typeface="Arial" panose="020B0604020202020204" pitchFamily="34" charset="0"/>
+              </a:rPr>
+              <a:t>     </a:t>
+            </a:r>
+            <a:endParaRPr kumimoji="0" lang="en-US" altLang="en-US" sz="3200" b="0" i="0" u="none" strike="noStrike" cap="none" normalizeH="0" baseline="0" dirty="0">
+              <a:ln>
+                <a:noFill/>
+              </a:ln>
+              <a:solidFill>
+                <a:srgbClr val="C00000"/>
+              </a:solidFill>
+              <a:effectLst/>
+              <a:latin typeface="Arial" panose="020B0604020202020204" pitchFamily="34" charset="0"/>
+            </a:endParaRPr>
+          </a:p>
+          <a:p>
+            <a:pPr marL="0" marR="0" lvl="0" indent="0" algn="l" defTabSz="914400" rtl="0" eaLnBrk="0" fontAlgn="base" latinLnBrk="0" hangingPunct="0">
+              <a:lnSpc>
+                <a:spcPct val="114000"/>
+              </a:lnSpc>
+              <a:spcBef>
+                <a:spcPct val="0"/>
+              </a:spcBef>
+              <a:spcAft>
+                <a:spcPct val="0"/>
+              </a:spcAft>
+              <a:buClrTx/>
+              <a:buSzTx/>
+              <a:buFontTx/>
+              <a:buNone/>
+              <a:tabLst/>
+            </a:pPr>
+            <a:r>
+              <a:rPr kumimoji="0" lang="en-US" altLang="en-US" sz="3200" b="0" i="0" u="none" strike="noStrike" cap="none" normalizeH="0" baseline="0" dirty="0">
+                <a:ln>
+                  <a:noFill/>
+                </a:ln>
+                <a:solidFill>
+                  <a:schemeClr val="tx1"/>
+                </a:solidFill>
+                <a:effectLst/>
+                <a:latin typeface="Arial" panose="020B0604020202020204" pitchFamily="34" charset="0"/>
+              </a:rPr>
+              <a:t>public default void </a:t>
+            </a:r>
+            <a:r>
+              <a:rPr kumimoji="0" lang="en-US" altLang="en-US" sz="3200" b="0" i="0" u="none" strike="noStrike" cap="none" normalizeH="0" baseline="0" dirty="0" err="1">
+                <a:ln>
+                  <a:noFill/>
+                </a:ln>
+                <a:solidFill>
+                  <a:schemeClr val="tx1"/>
+                </a:solidFill>
+                <a:effectLst/>
+                <a:latin typeface="Arial" panose="020B0604020202020204" pitchFamily="34" charset="0"/>
+              </a:rPr>
+              <a:t>someMethod</a:t>
+            </a:r>
+            <a:r>
+              <a:rPr kumimoji="0" lang="en-US" altLang="en-US" sz="3200" b="0" i="0" u="none" strike="noStrike" cap="none" normalizeH="0" baseline="0" dirty="0">
+                <a:ln>
+                  <a:noFill/>
+                </a:ln>
+                <a:solidFill>
+                  <a:schemeClr val="tx1"/>
+                </a:solidFill>
+                <a:effectLst/>
+                <a:latin typeface="Arial" panose="020B0604020202020204" pitchFamily="34" charset="0"/>
+              </a:rPr>
+              <a:t>() { }</a:t>
+            </a:r>
+          </a:p>
+          <a:p>
+            <a:pPr lvl="0" eaLnBrk="0" hangingPunct="0">
+              <a:lnSpc>
+                <a:spcPct val="114000"/>
+              </a:lnSpc>
+            </a:pPr>
+            <a:r>
+              <a:rPr kumimoji="0" lang="en-US" altLang="en-US" sz="3200" b="0" i="0" u="none" strike="noStrike" cap="none" normalizeH="0" baseline="0" dirty="0">
+                <a:ln>
+                  <a:noFill/>
+                </a:ln>
+                <a:solidFill>
+                  <a:schemeClr val="tx1"/>
+                </a:solidFill>
+                <a:effectLst/>
+                <a:latin typeface="Arial" panose="020B0604020202020204" pitchFamily="34" charset="0"/>
+              </a:rPr>
+              <a:t>private void </a:t>
+            </a:r>
+            <a:r>
+              <a:rPr kumimoji="0" lang="en-US" altLang="en-US" sz="3200" b="0" i="0" u="none" strike="noStrike" cap="none" normalizeH="0" baseline="0" dirty="0" err="1">
+                <a:ln>
+                  <a:noFill/>
+                </a:ln>
+                <a:solidFill>
+                  <a:schemeClr val="tx1"/>
+                </a:solidFill>
+                <a:effectLst/>
+                <a:latin typeface="Arial" panose="020B0604020202020204" pitchFamily="34" charset="0"/>
+              </a:rPr>
+              <a:t>someMethod</a:t>
+            </a:r>
+            <a:r>
+              <a:rPr kumimoji="0" lang="en-US" altLang="en-US" sz="3200" b="0" i="0" u="none" strike="noStrike" cap="none" normalizeH="0" baseline="0" dirty="0">
+                <a:ln>
+                  <a:noFill/>
+                </a:ln>
+                <a:solidFill>
+                  <a:schemeClr val="tx1"/>
+                </a:solidFill>
+                <a:effectLst/>
+                <a:latin typeface="Arial" panose="020B0604020202020204" pitchFamily="34" charset="0"/>
+              </a:rPr>
+              <a:t>() </a:t>
+            </a:r>
+            <a:r>
+              <a:rPr lang="en-US" altLang="en-US" sz="3200" dirty="0">
+                <a:latin typeface="Arial" panose="020B0604020202020204" pitchFamily="34" charset="0"/>
+              </a:rPr>
+              <a:t> { }</a:t>
+            </a:r>
+            <a:endParaRPr kumimoji="0" lang="en-US" altLang="en-US" sz="3200" b="0" i="0" u="none" strike="noStrike" cap="none" normalizeH="0" baseline="0" dirty="0">
+              <a:ln>
+                <a:noFill/>
+              </a:ln>
+              <a:solidFill>
+                <a:schemeClr val="tx1"/>
+              </a:solidFill>
+              <a:effectLst/>
+              <a:latin typeface="Arial" panose="020B0604020202020204" pitchFamily="34" charset="0"/>
+            </a:endParaRPr>
+          </a:p>
+          <a:p>
+            <a:pPr lvl="0" eaLnBrk="0" hangingPunct="0">
+              <a:lnSpc>
+                <a:spcPct val="114000"/>
+              </a:lnSpc>
+            </a:pPr>
+            <a:r>
+              <a:rPr kumimoji="0" lang="en-US" altLang="en-US" sz="3200" b="0" i="0" u="none" strike="noStrike" cap="none" normalizeH="0" baseline="0" dirty="0">
+                <a:ln>
+                  <a:noFill/>
+                </a:ln>
+                <a:solidFill>
+                  <a:schemeClr val="tx1"/>
+                </a:solidFill>
+                <a:effectLst/>
+                <a:latin typeface="Arial" panose="020B0604020202020204" pitchFamily="34" charset="0"/>
+              </a:rPr>
+              <a:t>public static void </a:t>
+            </a:r>
+            <a:r>
+              <a:rPr kumimoji="0" lang="en-US" altLang="en-US" sz="3200" b="0" i="0" u="none" strike="noStrike" cap="none" normalizeH="0" baseline="0" dirty="0" err="1">
+                <a:ln>
+                  <a:noFill/>
+                </a:ln>
+                <a:solidFill>
+                  <a:schemeClr val="tx1"/>
+                </a:solidFill>
+                <a:effectLst/>
+                <a:latin typeface="Arial" panose="020B0604020202020204" pitchFamily="34" charset="0"/>
+              </a:rPr>
+              <a:t>someMethod</a:t>
+            </a:r>
+            <a:r>
+              <a:rPr kumimoji="0" lang="en-US" altLang="en-US" sz="3200" b="0" i="0" u="none" strike="noStrike" cap="none" normalizeH="0" baseline="0" dirty="0">
+                <a:ln>
+                  <a:noFill/>
+                </a:ln>
+                <a:solidFill>
+                  <a:schemeClr val="tx1"/>
+                </a:solidFill>
+                <a:effectLst/>
+                <a:latin typeface="Arial" panose="020B0604020202020204" pitchFamily="34" charset="0"/>
+              </a:rPr>
+              <a:t>() </a:t>
+            </a:r>
+            <a:r>
+              <a:rPr lang="en-US" altLang="en-US" sz="3200" dirty="0">
+                <a:latin typeface="Arial" panose="020B0604020202020204" pitchFamily="34" charset="0"/>
+              </a:rPr>
+              <a:t> { }</a:t>
+            </a:r>
+            <a:endParaRPr kumimoji="0" lang="en-US" altLang="en-US" sz="3200" b="0" i="0" u="none" strike="noStrike" cap="none" normalizeH="0" baseline="0" dirty="0">
+              <a:ln>
+                <a:noFill/>
+              </a:ln>
+              <a:solidFill>
+                <a:schemeClr val="tx1"/>
+              </a:solidFill>
+              <a:effectLst/>
+              <a:latin typeface="Arial" panose="020B0604020202020204" pitchFamily="34" charset="0"/>
+            </a:endParaRPr>
+          </a:p>
+          <a:p>
+            <a:pPr lvl="0" eaLnBrk="0" hangingPunct="0">
+              <a:lnSpc>
+                <a:spcPct val="114000"/>
+              </a:lnSpc>
+            </a:pPr>
+            <a:r>
+              <a:rPr kumimoji="0" lang="en-US" altLang="en-US" sz="3200" b="0" i="0" u="none" strike="noStrike" cap="none" normalizeH="0" baseline="0" dirty="0">
+                <a:ln>
+                  <a:noFill/>
+                </a:ln>
+                <a:solidFill>
+                  <a:schemeClr val="tx1"/>
+                </a:solidFill>
+                <a:effectLst/>
+                <a:latin typeface="Arial" panose="020B0604020202020204" pitchFamily="34" charset="0"/>
+              </a:rPr>
+              <a:t>private static void </a:t>
+            </a:r>
+            <a:r>
+              <a:rPr kumimoji="0" lang="en-US" altLang="en-US" sz="3200" b="0" i="0" u="none" strike="noStrike" cap="none" normalizeH="0" baseline="0" dirty="0" err="1">
+                <a:ln>
+                  <a:noFill/>
+                </a:ln>
+                <a:solidFill>
+                  <a:schemeClr val="tx1"/>
+                </a:solidFill>
+                <a:effectLst/>
+                <a:latin typeface="Arial" panose="020B0604020202020204" pitchFamily="34" charset="0"/>
+              </a:rPr>
+              <a:t>someMethod</a:t>
+            </a:r>
+            <a:r>
+              <a:rPr kumimoji="0" lang="en-US" altLang="en-US" sz="3200" b="0" i="0" u="none" strike="noStrike" cap="none" normalizeH="0" baseline="0" dirty="0">
+                <a:ln>
+                  <a:noFill/>
+                </a:ln>
+                <a:solidFill>
+                  <a:schemeClr val="tx1"/>
+                </a:solidFill>
+                <a:effectLst/>
+                <a:latin typeface="Arial" panose="020B0604020202020204" pitchFamily="34" charset="0"/>
+              </a:rPr>
+              <a:t>() </a:t>
+            </a:r>
+            <a:r>
+              <a:rPr lang="en-US" altLang="en-US" sz="3200" dirty="0">
+                <a:latin typeface="Arial" panose="020B0604020202020204" pitchFamily="34" charset="0"/>
+              </a:rPr>
+              <a:t> { }</a:t>
+            </a:r>
+            <a:endParaRPr kumimoji="0" lang="en-US" altLang="en-US" sz="3200" b="0" i="0" u="none" strike="noStrike" cap="none" normalizeH="0" baseline="0" dirty="0">
+              <a:ln>
+                <a:noFill/>
+              </a:ln>
+              <a:solidFill>
+                <a:schemeClr val="tx1"/>
+              </a:solidFill>
+              <a:effectLst/>
+              <a:latin typeface="Arial" panose="020B0604020202020204" pitchFamily="34" charset="0"/>
+            </a:endParaRPr>
+          </a:p>
+        </p:txBody>
+      </p:sp>
+    </p:spTree>
+    <p:extLst>
+      <p:ext uri="{BB962C8B-B14F-4D97-AF65-F5344CB8AC3E}">
+        <p14:creationId xmlns:p14="http://schemas.microsoft.com/office/powerpoint/2010/main" val="2001403540"/>
+      </p:ext>
+    </p:extLst>
+  </p:cSld>
+  <p:clrMapOvr>
+    <a:masterClrMapping/>
+  </p:clrMapOvr>
+  <p:timing>
+    <p:tnLst>
+      <p:par>
+        <p:cTn id="1" dur="indefinite" restart="never" nodeType="tmRoot">
+          <p:childTnLst>
+            <p:seq concurrent="1" nextAc="seek">
+              <p:cTn id="2" dur="indefinite" nodeType="mainSeq">
+                <p:childTnLst>
+                  <p:par>
+                    <p:cTn id="3" fill="hold">
+                      <p:stCondLst>
+                        <p:cond delay="indefinite"/>
+                      </p:stCondLst>
+                      <p:childTnLst>
+                        <p:par>
+                          <p:cTn id="4" fill="hold">
+                            <p:stCondLst>
+                              <p:cond delay="0"/>
+                            </p:stCondLst>
+                            <p:childTnLst>
+                              <p:par>
+                                <p:cTn id="5" presetID="1" presetClass="entr" presetSubtype="0" fill="hold" grpId="0" nodeType="clickEffect">
+                                  <p:stCondLst>
+                                    <p:cond delay="0"/>
+                                  </p:stCondLst>
+                                  <p:childTnLst>
+                                    <p:set>
+                                      <p:cBhvr>
+                                        <p:cTn id="6" dur="1" fill="hold">
+                                          <p:stCondLst>
+                                            <p:cond delay="0"/>
+                                          </p:stCondLst>
+                                        </p:cTn>
+                                        <p:tgtEl>
+                                          <p:spTgt spid="7"/>
+                                        </p:tgtEl>
+                                        <p:attrNameLst>
+                                          <p:attrName>style.visibility</p:attrName>
+                                        </p:attrNameLst>
+                                      </p:cBhvr>
+                                      <p:to>
+                                        <p:strVal val="visible"/>
+                                      </p:to>
+                                    </p:set>
+                                  </p:childTnLst>
+                                </p:cTn>
+                              </p:par>
+                            </p:childTnLst>
+                          </p:cTn>
+                        </p:par>
+                      </p:childTnLst>
+                    </p:cTn>
+                  </p:par>
+                </p:childTnLst>
+              </p:cTn>
+              <p:prevCondLst>
+                <p:cond evt="onPrev" delay="0">
+                  <p:tgtEl>
+                    <p:sldTgt/>
+                  </p:tgtEl>
+                </p:cond>
+              </p:prevCondLst>
+              <p:nextCondLst>
+                <p:cond evt="onNext" delay="0">
+                  <p:tgtEl>
+                    <p:sldTgt/>
+                  </p:tgtEl>
+                </p:cond>
+              </p:nextCondLst>
+            </p:seq>
+          </p:childTnLst>
+        </p:cTn>
+      </p:par>
+    </p:tnLst>
+    <p:bldLst>
+      <p:bldP spid="7" grpId="0"/>
+    </p:bldLst>
+  </p:timing>
+</p:sld>
+</file>
+
+<file path=ppt/slides/slide26.xml><?xml version="1.0" encoding="utf-8"?>
+<p:sld xmlns:a="http://schemas.openxmlformats.org/drawingml/2006/main" xmlns:r="http://schemas.openxmlformats.org/officeDocument/2006/relationships" xmlns:p="http://schemas.openxmlformats.org/presentationml/2006/main">
+  <p:cSld>
+    <p:spTree>
+      <p:nvGrpSpPr>
         <p:cNvPr id="1" name=""/>
         <p:cNvGrpSpPr/>
         <p:nvPr/>
@@ -12499,7 +14469,7 @@
 </p:sld>
 </file>
 
-<file path=ppt/slides/slide25.xml><?xml version="1.0" encoding="utf-8"?>
+<file path=ppt/slides/slide27.xml><?xml version="1.0" encoding="utf-8"?>
 <p:sld xmlns:a="http://schemas.openxmlformats.org/drawingml/2006/main" xmlns:r="http://schemas.openxmlformats.org/officeDocument/2006/relationships" xmlns:p="http://schemas.openxmlformats.org/presentationml/2006/main">
   <p:cSld>
     <p:spTree>
@@ -12996,7 +14966,7 @@
 </p:sld>
 </file>
 
-<file path=ppt/slides/slide26.xml><?xml version="1.0" encoding="utf-8"?>
+<file path=ppt/slides/slide28.xml><?xml version="1.0" encoding="utf-8"?>
 <p:sld xmlns:a="http://schemas.openxmlformats.org/drawingml/2006/main" xmlns:r="http://schemas.openxmlformats.org/officeDocument/2006/relationships" xmlns:p="http://schemas.openxmlformats.org/presentationml/2006/main">
   <p:cSld>
     <p:spTree>
@@ -13378,7 +15348,7 @@
 </p:sld>
 </file>
 
-<file path=ppt/slides/slide27.xml><?xml version="1.0" encoding="utf-8"?>
+<file path=ppt/slides/slide29.xml><?xml version="1.0" encoding="utf-8"?>
 <p:sld xmlns:a="http://schemas.openxmlformats.org/drawingml/2006/main" xmlns:r="http://schemas.openxmlformats.org/officeDocument/2006/relationships" xmlns:p="http://schemas.openxmlformats.org/presentationml/2006/main">
   <p:cSld>
     <p:spTree>
@@ -13791,7 +15761,471 @@
 </p:sld>
 </file>
 
-<file path=ppt/slides/slide28.xml><?xml version="1.0" encoding="utf-8"?>
+<file path=ppt/slides/slide3.xml><?xml version="1.0" encoding="utf-8"?>
+<p:sld xmlns:a="http://schemas.openxmlformats.org/drawingml/2006/main" xmlns:r="http://schemas.openxmlformats.org/officeDocument/2006/relationships" xmlns:p="http://schemas.openxmlformats.org/presentationml/2006/main">
+  <p:cSld>
+    <p:spTree>
+      <p:nvGrpSpPr>
+        <p:cNvPr id="1" name="">
+          <a:extLst>
+            <a:ext uri="{FF2B5EF4-FFF2-40B4-BE49-F238E27FC236}">
+              <a16:creationId xmlns:a16="http://schemas.microsoft.com/office/drawing/2014/main" id="{9334C6B5-0D84-6D71-EB88-6D07F7A4DC01}"/>
+            </a:ext>
+          </a:extLst>
+        </p:cNvPr>
+        <p:cNvGrpSpPr/>
+        <p:nvPr/>
+      </p:nvGrpSpPr>
+      <p:grpSpPr>
+        <a:xfrm>
+          <a:off x="0" y="0"/>
+          <a:ext cx="0" cy="0"/>
+          <a:chOff x="0" y="0"/>
+          <a:chExt cx="0" cy="0"/>
+        </a:xfrm>
+      </p:grpSpPr>
+      <p:sp>
+        <p:nvSpPr>
+          <p:cNvPr id="2" name="Title 1">
+            <a:extLst>
+              <a:ext uri="{FF2B5EF4-FFF2-40B4-BE49-F238E27FC236}">
+                <a16:creationId xmlns:a16="http://schemas.microsoft.com/office/drawing/2014/main" id="{604171FB-C547-8257-6123-EA269E9E77D8}"/>
+              </a:ext>
+            </a:extLst>
+          </p:cNvPr>
+          <p:cNvSpPr>
+            <a:spLocks noGrp="1"/>
+          </p:cNvSpPr>
+          <p:nvPr>
+            <p:ph type="title"/>
+          </p:nvPr>
+        </p:nvSpPr>
+        <p:spPr>
+          <a:xfrm rot="401501">
+            <a:off x="214497" y="296482"/>
+            <a:ext cx="10197282" cy="1143000"/>
+          </a:xfrm>
+          <a:ln>
+            <a:noFill/>
+          </a:ln>
+          <a:effectLst>
+            <a:outerShdw blurRad="225425" dist="50800" dir="5220000" algn="ctr">
+              <a:srgbClr val="000000">
+                <a:alpha val="33000"/>
+              </a:srgbClr>
+            </a:outerShdw>
+          </a:effectLst>
+          <a:scene3d>
+            <a:camera prst="perspectiveFront" fov="3300000">
+              <a:rot lat="486000" lon="19530000" rev="174000"/>
+            </a:camera>
+            <a:lightRig rig="harsh" dir="t">
+              <a:rot lat="0" lon="0" rev="3000000"/>
+            </a:lightRig>
+          </a:scene3d>
+          <a:sp3d extrusionH="254000" contourW="19050">
+            <a:bevelT w="82550" h="44450" prst="angle"/>
+            <a:bevelB w="82550" h="44450" prst="angle"/>
+            <a:contourClr>
+              <a:srgbClr val="FFFFFF"/>
+            </a:contourClr>
+          </a:sp3d>
+        </p:spPr>
+        <p:txBody>
+          <a:bodyPr/>
+          <a:lstStyle/>
+          <a:p>
+            <a:r>
+              <a:rPr lang="en-US" sz="6600" dirty="0">
+                <a:latin typeface="Abadi" panose="020B0604020104020204" pitchFamily="34" charset="0"/>
+              </a:rPr>
+              <a:t>Default Methods</a:t>
+            </a:r>
+          </a:p>
+        </p:txBody>
+      </p:sp>
+      <p:sp>
+        <p:nvSpPr>
+          <p:cNvPr id="3" name="Content Placeholder 2">
+            <a:extLst>
+              <a:ext uri="{FF2B5EF4-FFF2-40B4-BE49-F238E27FC236}">
+                <a16:creationId xmlns:a16="http://schemas.microsoft.com/office/drawing/2014/main" id="{273D83E1-BAAD-CD9C-2C84-5F2309979C57}"/>
+              </a:ext>
+            </a:extLst>
+          </p:cNvPr>
+          <p:cNvSpPr>
+            <a:spLocks noGrp="1"/>
+          </p:cNvSpPr>
+          <p:nvPr>
+            <p:ph idx="1"/>
+          </p:nvPr>
+        </p:nvSpPr>
+        <p:spPr>
+          <a:xfrm>
+            <a:off x="558800" y="1933196"/>
+            <a:ext cx="8209280" cy="1495804"/>
+          </a:xfrm>
+        </p:spPr>
+        <p:txBody>
+          <a:bodyPr/>
+          <a:lstStyle/>
+          <a:p>
+            <a:pPr marL="0" indent="0">
+              <a:buNone/>
+            </a:pPr>
+            <a:r>
+              <a:rPr lang="en-US" sz="3600" dirty="0">
+                <a:latin typeface="Abadi" panose="020B0604020104020204" pitchFamily="34" charset="0"/>
+              </a:rPr>
+              <a:t>We declare them with the </a:t>
+            </a:r>
+            <a:r>
+              <a:rPr lang="en-US" sz="3600" dirty="0">
+                <a:latin typeface="Cascadia Code" panose="020B0609020000020004" pitchFamily="49" charset="0"/>
+                <a:cs typeface="Cascadia Code" panose="020B0609020000020004" pitchFamily="49" charset="0"/>
+              </a:rPr>
+              <a:t>default</a:t>
+            </a:r>
+            <a:r>
+              <a:rPr lang="en-US" sz="3600" dirty="0">
+                <a:latin typeface="Abadi" panose="020B0604020104020204" pitchFamily="34" charset="0"/>
+              </a:rPr>
+              <a:t> modifier and provide an implementation:</a:t>
+            </a:r>
+            <a:endParaRPr lang="en-US" sz="3600" dirty="0"/>
+          </a:p>
+        </p:txBody>
+      </p:sp>
+      <p:sp>
+        <p:nvSpPr>
+          <p:cNvPr id="5" name="TextBox 4">
+            <a:extLst>
+              <a:ext uri="{FF2B5EF4-FFF2-40B4-BE49-F238E27FC236}">
+                <a16:creationId xmlns:a16="http://schemas.microsoft.com/office/drawing/2014/main" id="{C28CD9FA-A17D-9B10-5992-74A152AB94E9}"/>
+              </a:ext>
+            </a:extLst>
+          </p:cNvPr>
+          <p:cNvSpPr txBox="1"/>
+          <p:nvPr/>
+        </p:nvSpPr>
+        <p:spPr>
+          <a:xfrm>
+            <a:off x="416560" y="3521968"/>
+            <a:ext cx="8564880" cy="3046988"/>
+          </a:xfrm>
+          <a:prstGeom prst="rect">
+            <a:avLst/>
+          </a:prstGeom>
+          <a:noFill/>
+        </p:spPr>
+        <p:txBody>
+          <a:bodyPr wrap="square">
+            <a:spAutoFit/>
+          </a:bodyPr>
+          <a:lstStyle/>
+          <a:p>
+            <a:r>
+              <a:rPr lang="en-US" sz="2400" b="1" i="0" dirty="0">
+                <a:effectLst/>
+                <a:latin typeface="Source Code Pro" panose="020B0509030403020204" pitchFamily="49" charset="0"/>
+              </a:rPr>
+              <a:t>public</a:t>
+            </a:r>
+            <a:r>
+              <a:rPr lang="en-US" sz="2400" b="0" i="0" dirty="0">
+                <a:effectLst/>
+                <a:latin typeface="Source Code Pro" panose="020B0509030403020204" pitchFamily="49" charset="0"/>
+              </a:rPr>
+              <a:t> </a:t>
+            </a:r>
+            <a:r>
+              <a:rPr lang="en-US" sz="2400" b="1" i="0" dirty="0">
+                <a:effectLst/>
+                <a:latin typeface="Source Code Pro" panose="020B0509030403020204" pitchFamily="49" charset="0"/>
+              </a:rPr>
+              <a:t>interface</a:t>
+            </a:r>
+            <a:r>
+              <a:rPr lang="en-US" sz="2400" b="0" i="0" dirty="0">
+                <a:effectLst/>
+                <a:latin typeface="Source Code Pro" panose="020B0509030403020204" pitchFamily="49" charset="0"/>
+              </a:rPr>
+              <a:t> </a:t>
+            </a:r>
+            <a:r>
+              <a:rPr lang="en-US" sz="2400" b="1" i="0" dirty="0" err="1">
+                <a:effectLst/>
+                <a:latin typeface="Source Code Pro" panose="020B0509030403020204" pitchFamily="49" charset="0"/>
+              </a:rPr>
+              <a:t>MyInterface</a:t>
+            </a:r>
+            <a:r>
+              <a:rPr lang="en-US" sz="2400" b="0" i="0" dirty="0">
+                <a:effectLst/>
+                <a:latin typeface="Source Code Pro" panose="020B0509030403020204" pitchFamily="49" charset="0"/>
+              </a:rPr>
+              <a:t> { </a:t>
+            </a:r>
+            <a:br>
+              <a:rPr lang="en-US" sz="2400" b="0" i="0" dirty="0">
+                <a:effectLst/>
+                <a:latin typeface="Source Code Pro" panose="020B0509030403020204" pitchFamily="49" charset="0"/>
+              </a:rPr>
+            </a:br>
+            <a:r>
+              <a:rPr lang="en-US" sz="2400" b="0" i="0" dirty="0">
+                <a:effectLst/>
+                <a:latin typeface="Source Code Pro" panose="020B0509030403020204" pitchFamily="49" charset="0"/>
+              </a:rPr>
+              <a:t>  // regular interface method</a:t>
+            </a:r>
+          </a:p>
+          <a:p>
+            <a:r>
+              <a:rPr lang="en-US" sz="2400" dirty="0">
+                <a:latin typeface="Source Code Pro" panose="020B0509030403020204" pitchFamily="49" charset="0"/>
+              </a:rPr>
+              <a:t>  </a:t>
+            </a:r>
+            <a:r>
+              <a:rPr lang="en-US" sz="2400" b="1" dirty="0">
+                <a:latin typeface="Source Code Pro" panose="020B0509030403020204" pitchFamily="49" charset="0"/>
+              </a:rPr>
+              <a:t>void </a:t>
+            </a:r>
+            <a:r>
+              <a:rPr lang="en-US" sz="2400" b="1" dirty="0" err="1">
+                <a:latin typeface="Source Code Pro" panose="020B0509030403020204" pitchFamily="49" charset="0"/>
+              </a:rPr>
+              <a:t>normalMethod</a:t>
+            </a:r>
+            <a:r>
+              <a:rPr lang="en-US" sz="2400" b="1" dirty="0">
+                <a:latin typeface="Source Code Pro" panose="020B0509030403020204" pitchFamily="49" charset="0"/>
+              </a:rPr>
+              <a:t>()</a:t>
+            </a:r>
+            <a:r>
+              <a:rPr lang="en-US" sz="2400" b="1" dirty="0">
+                <a:highlight>
+                  <a:srgbClr val="FFFF00"/>
+                </a:highlight>
+                <a:latin typeface="Source Code Pro" panose="020B0509030403020204" pitchFamily="49" charset="0"/>
+              </a:rPr>
+              <a:t>;</a:t>
+            </a:r>
+            <a:r>
+              <a:rPr lang="en-US" sz="2400" b="1" dirty="0">
+                <a:latin typeface="Source Code Pro" panose="020B0509030403020204" pitchFamily="49" charset="0"/>
+              </a:rPr>
+              <a:t>  </a:t>
+            </a:r>
+            <a:r>
+              <a:rPr lang="en-US" sz="2400" b="1" dirty="0">
+                <a:solidFill>
+                  <a:srgbClr val="008000"/>
+                </a:solidFill>
+                <a:latin typeface="Source Code Pro" panose="020B0509030403020204" pitchFamily="49" charset="0"/>
+                <a:sym typeface="Wingdings" panose="05000000000000000000" pitchFamily="2" charset="2"/>
+              </a:rPr>
+              <a:t></a:t>
+            </a:r>
+            <a:r>
+              <a:rPr lang="en-US" sz="2400" b="1" dirty="0">
+                <a:solidFill>
+                  <a:srgbClr val="008000"/>
+                </a:solidFill>
+                <a:latin typeface="Source Code Pro" panose="020B0509030403020204" pitchFamily="49" charset="0"/>
+              </a:rPr>
+              <a:t> no implementation</a:t>
+            </a:r>
+            <a:br>
+              <a:rPr lang="en-US" sz="2400" b="0" i="0" dirty="0">
+                <a:solidFill>
+                  <a:schemeClr val="accent6">
+                    <a:lumMod val="75000"/>
+                  </a:schemeClr>
+                </a:solidFill>
+                <a:effectLst/>
+                <a:latin typeface="Source Code Pro" panose="020B0509030403020204" pitchFamily="49" charset="0"/>
+              </a:rPr>
+            </a:br>
+            <a:endParaRPr lang="en-US" sz="2400" b="0" i="0" dirty="0">
+              <a:solidFill>
+                <a:schemeClr val="accent6">
+                  <a:lumMod val="75000"/>
+                </a:schemeClr>
+              </a:solidFill>
+              <a:effectLst/>
+              <a:latin typeface="Source Code Pro" panose="020B0509030403020204" pitchFamily="49" charset="0"/>
+            </a:endParaRPr>
+          </a:p>
+          <a:p>
+            <a:r>
+              <a:rPr lang="en-US" sz="2400" dirty="0">
+                <a:solidFill>
+                  <a:schemeClr val="accent6">
+                    <a:lumMod val="75000"/>
+                  </a:schemeClr>
+                </a:solidFill>
+                <a:latin typeface="Source Code Pro" panose="020B0509030403020204" pitchFamily="49" charset="0"/>
+              </a:rPr>
+              <a:t>  </a:t>
+            </a:r>
+            <a:r>
+              <a:rPr lang="en-US" sz="2400" b="1" i="0" dirty="0">
+                <a:solidFill>
+                  <a:schemeClr val="accent6">
+                    <a:lumMod val="75000"/>
+                  </a:schemeClr>
+                </a:solidFill>
+                <a:effectLst/>
+                <a:latin typeface="Source Code Pro" panose="020B0509030403020204" pitchFamily="49" charset="0"/>
+              </a:rPr>
+              <a:t>default</a:t>
+            </a:r>
+            <a:r>
+              <a:rPr lang="en-US" sz="2400" b="0" i="0" dirty="0">
+                <a:solidFill>
+                  <a:schemeClr val="accent6">
+                    <a:lumMod val="75000"/>
+                  </a:schemeClr>
+                </a:solidFill>
+                <a:effectLst/>
+                <a:latin typeface="Source Code Pro" panose="020B0509030403020204" pitchFamily="49" charset="0"/>
+              </a:rPr>
+              <a:t> </a:t>
+            </a:r>
+            <a:r>
+              <a:rPr lang="en-US" sz="2400" b="1" i="0" dirty="0">
+                <a:solidFill>
+                  <a:schemeClr val="accent6">
+                    <a:lumMod val="75000"/>
+                  </a:schemeClr>
+                </a:solidFill>
+                <a:effectLst/>
+                <a:latin typeface="Source Code Pro" panose="020B0509030403020204" pitchFamily="49" charset="0"/>
+              </a:rPr>
+              <a:t>void</a:t>
+            </a:r>
+            <a:r>
+              <a:rPr lang="en-US" sz="2400" b="0" i="0" dirty="0">
+                <a:solidFill>
+                  <a:schemeClr val="accent6">
+                    <a:lumMod val="75000"/>
+                  </a:schemeClr>
+                </a:solidFill>
+                <a:effectLst/>
+                <a:latin typeface="Source Code Pro" panose="020B0509030403020204" pitchFamily="49" charset="0"/>
+              </a:rPr>
+              <a:t> </a:t>
+            </a:r>
+            <a:r>
+              <a:rPr lang="en-US" sz="2400" b="1" i="0" dirty="0" err="1">
+                <a:solidFill>
+                  <a:schemeClr val="accent6">
+                    <a:lumMod val="75000"/>
+                  </a:schemeClr>
+                </a:solidFill>
+                <a:effectLst/>
+                <a:latin typeface="Source Code Pro" panose="020B0509030403020204" pitchFamily="49" charset="0"/>
+              </a:rPr>
+              <a:t>defaultMethod</a:t>
+            </a:r>
+            <a:r>
+              <a:rPr lang="en-US" sz="2400" b="0" i="0" dirty="0">
+                <a:solidFill>
+                  <a:schemeClr val="accent6">
+                    <a:lumMod val="75000"/>
+                  </a:schemeClr>
+                </a:solidFill>
+                <a:effectLst/>
+                <a:latin typeface="Source Code Pro" panose="020B0509030403020204" pitchFamily="49" charset="0"/>
+              </a:rPr>
+              <a:t>() { </a:t>
+            </a:r>
+            <a:br>
+              <a:rPr lang="en-US" sz="2400" b="0" i="0" dirty="0">
+                <a:solidFill>
+                  <a:schemeClr val="accent6">
+                    <a:lumMod val="75000"/>
+                  </a:schemeClr>
+                </a:solidFill>
+                <a:effectLst/>
+                <a:latin typeface="Source Code Pro" panose="020B0509030403020204" pitchFamily="49" charset="0"/>
+              </a:rPr>
+            </a:br>
+            <a:r>
+              <a:rPr lang="en-US" sz="2400" b="0" i="0" dirty="0">
+                <a:solidFill>
+                  <a:schemeClr val="accent6">
+                    <a:lumMod val="75000"/>
+                  </a:schemeClr>
+                </a:solidFill>
+                <a:effectLst/>
+                <a:latin typeface="Source Code Pro" panose="020B0509030403020204" pitchFamily="49" charset="0"/>
+              </a:rPr>
+              <a:t>    // implementation </a:t>
+            </a:r>
+            <a:br>
+              <a:rPr lang="en-US" sz="2400" b="0" i="0" dirty="0">
+                <a:solidFill>
+                  <a:schemeClr val="accent6">
+                    <a:lumMod val="75000"/>
+                  </a:schemeClr>
+                </a:solidFill>
+                <a:effectLst/>
+                <a:latin typeface="Source Code Pro" panose="020B0509030403020204" pitchFamily="49" charset="0"/>
+              </a:rPr>
+            </a:br>
+            <a:r>
+              <a:rPr lang="en-US" sz="2400" b="0" i="0" dirty="0">
+                <a:solidFill>
+                  <a:schemeClr val="accent6">
+                    <a:lumMod val="75000"/>
+                  </a:schemeClr>
+                </a:solidFill>
+                <a:effectLst/>
+                <a:latin typeface="Source Code Pro" panose="020B0509030403020204" pitchFamily="49" charset="0"/>
+              </a:rPr>
+              <a:t>  } </a:t>
+            </a:r>
+            <a:br>
+              <a:rPr lang="en-US" sz="2400" b="0" i="0" dirty="0">
+                <a:solidFill>
+                  <a:schemeClr val="accent6">
+                    <a:lumMod val="75000"/>
+                  </a:schemeClr>
+                </a:solidFill>
+                <a:effectLst/>
+                <a:latin typeface="Source Code Pro" panose="020B0509030403020204" pitchFamily="49" charset="0"/>
+              </a:rPr>
+            </a:br>
+            <a:r>
+              <a:rPr lang="en-US" sz="2400" b="0" i="0" dirty="0">
+                <a:effectLst/>
+                <a:latin typeface="Source Code Pro" panose="020B0509030403020204" pitchFamily="49" charset="0"/>
+              </a:rPr>
+              <a:t>}</a:t>
+            </a:r>
+            <a:endParaRPr lang="en-US" sz="2400" dirty="0"/>
+          </a:p>
+        </p:txBody>
+      </p:sp>
+    </p:spTree>
+    <p:extLst>
+      <p:ext uri="{BB962C8B-B14F-4D97-AF65-F5344CB8AC3E}">
+        <p14:creationId xmlns:p14="http://schemas.microsoft.com/office/powerpoint/2010/main" val="893038708"/>
+      </p:ext>
+    </p:extLst>
+  </p:cSld>
+  <p:clrMapOvr>
+    <a:masterClrMapping/>
+  </p:clrMapOvr>
+</p:sld>
+</file>
+
+<file path=ppt/slides/slide30.xml><?xml version="1.0" encoding="utf-8"?>
 <p:sld xmlns:a="http://schemas.openxmlformats.org/drawingml/2006/main" xmlns:r="http://schemas.openxmlformats.org/officeDocument/2006/relationships" xmlns:p="http://schemas.openxmlformats.org/presentationml/2006/main">
   <p:cSld>
     <p:spTree>
@@ -14279,7 +16713,7 @@
 </p:sld>
 </file>
 
-<file path=ppt/slides/slide29.xml><?xml version="1.0" encoding="utf-8"?>
+<file path=ppt/slides/slide31.xml><?xml version="1.0" encoding="utf-8"?>
 <p:sld xmlns:a="http://schemas.openxmlformats.org/drawingml/2006/main" xmlns:r="http://schemas.openxmlformats.org/officeDocument/2006/relationships" xmlns:p="http://schemas.openxmlformats.org/presentationml/2006/main">
   <p:cSld>
     <p:spTree>
@@ -14838,470 +17272,6 @@
       <p:bldP spid="8" grpId="0"/>
     </p:bldLst>
   </p:timing>
-</p:sld>
-</file>
-
-<file path=ppt/slides/slide3.xml><?xml version="1.0" encoding="utf-8"?>
-<p:sld xmlns:a="http://schemas.openxmlformats.org/drawingml/2006/main" xmlns:r="http://schemas.openxmlformats.org/officeDocument/2006/relationships" xmlns:p="http://schemas.openxmlformats.org/presentationml/2006/main">
-  <p:cSld>
-    <p:spTree>
-      <p:nvGrpSpPr>
-        <p:cNvPr id="1" name="">
-          <a:extLst>
-            <a:ext uri="{FF2B5EF4-FFF2-40B4-BE49-F238E27FC236}">
-              <a16:creationId xmlns:a16="http://schemas.microsoft.com/office/drawing/2014/main" id="{9334C6B5-0D84-6D71-EB88-6D07F7A4DC01}"/>
-            </a:ext>
-          </a:extLst>
-        </p:cNvPr>
-        <p:cNvGrpSpPr/>
-        <p:nvPr/>
-      </p:nvGrpSpPr>
-      <p:grpSpPr>
-        <a:xfrm>
-          <a:off x="0" y="0"/>
-          <a:ext cx="0" cy="0"/>
-          <a:chOff x="0" y="0"/>
-          <a:chExt cx="0" cy="0"/>
-        </a:xfrm>
-      </p:grpSpPr>
-      <p:sp>
-        <p:nvSpPr>
-          <p:cNvPr id="2" name="Title 1">
-            <a:extLst>
-              <a:ext uri="{FF2B5EF4-FFF2-40B4-BE49-F238E27FC236}">
-                <a16:creationId xmlns:a16="http://schemas.microsoft.com/office/drawing/2014/main" id="{604171FB-C547-8257-6123-EA269E9E77D8}"/>
-              </a:ext>
-            </a:extLst>
-          </p:cNvPr>
-          <p:cNvSpPr>
-            <a:spLocks noGrp="1"/>
-          </p:cNvSpPr>
-          <p:nvPr>
-            <p:ph type="title"/>
-          </p:nvPr>
-        </p:nvSpPr>
-        <p:spPr>
-          <a:xfrm rot="401501">
-            <a:off x="214497" y="296482"/>
-            <a:ext cx="10197282" cy="1143000"/>
-          </a:xfrm>
-          <a:ln>
-            <a:noFill/>
-          </a:ln>
-          <a:effectLst>
-            <a:outerShdw blurRad="225425" dist="50800" dir="5220000" algn="ctr">
-              <a:srgbClr val="000000">
-                <a:alpha val="33000"/>
-              </a:srgbClr>
-            </a:outerShdw>
-          </a:effectLst>
-          <a:scene3d>
-            <a:camera prst="perspectiveFront" fov="3300000">
-              <a:rot lat="486000" lon="19530000" rev="174000"/>
-            </a:camera>
-            <a:lightRig rig="harsh" dir="t">
-              <a:rot lat="0" lon="0" rev="3000000"/>
-            </a:lightRig>
-          </a:scene3d>
-          <a:sp3d extrusionH="254000" contourW="19050">
-            <a:bevelT w="82550" h="44450" prst="angle"/>
-            <a:bevelB w="82550" h="44450" prst="angle"/>
-            <a:contourClr>
-              <a:srgbClr val="FFFFFF"/>
-            </a:contourClr>
-          </a:sp3d>
-        </p:spPr>
-        <p:txBody>
-          <a:bodyPr/>
-          <a:lstStyle/>
-          <a:p>
-            <a:r>
-              <a:rPr lang="en-US" sz="6600" dirty="0">
-                <a:latin typeface="Abadi" panose="020B0604020104020204" pitchFamily="34" charset="0"/>
-              </a:rPr>
-              <a:t>Default Methods</a:t>
-            </a:r>
-          </a:p>
-        </p:txBody>
-      </p:sp>
-      <p:sp>
-        <p:nvSpPr>
-          <p:cNvPr id="3" name="Content Placeholder 2">
-            <a:extLst>
-              <a:ext uri="{FF2B5EF4-FFF2-40B4-BE49-F238E27FC236}">
-                <a16:creationId xmlns:a16="http://schemas.microsoft.com/office/drawing/2014/main" id="{273D83E1-BAAD-CD9C-2C84-5F2309979C57}"/>
-              </a:ext>
-            </a:extLst>
-          </p:cNvPr>
-          <p:cNvSpPr>
-            <a:spLocks noGrp="1"/>
-          </p:cNvSpPr>
-          <p:nvPr>
-            <p:ph idx="1"/>
-          </p:nvPr>
-        </p:nvSpPr>
-        <p:spPr>
-          <a:xfrm>
-            <a:off x="558800" y="1933196"/>
-            <a:ext cx="8209280" cy="1495804"/>
-          </a:xfrm>
-        </p:spPr>
-        <p:txBody>
-          <a:bodyPr/>
-          <a:lstStyle/>
-          <a:p>
-            <a:pPr marL="0" indent="0">
-              <a:buNone/>
-            </a:pPr>
-            <a:r>
-              <a:rPr lang="en-US" sz="3600" dirty="0">
-                <a:latin typeface="Abadi" panose="020B0604020104020204" pitchFamily="34" charset="0"/>
-              </a:rPr>
-              <a:t>We declare them with the </a:t>
-            </a:r>
-            <a:r>
-              <a:rPr lang="en-US" sz="3600" dirty="0">
-                <a:latin typeface="Cascadia Code" panose="020B0609020000020004" pitchFamily="49" charset="0"/>
-                <a:cs typeface="Cascadia Code" panose="020B0609020000020004" pitchFamily="49" charset="0"/>
-              </a:rPr>
-              <a:t>default</a:t>
-            </a:r>
-            <a:r>
-              <a:rPr lang="en-US" sz="3600" dirty="0">
-                <a:latin typeface="Abadi" panose="020B0604020104020204" pitchFamily="34" charset="0"/>
-              </a:rPr>
-              <a:t> modifier and provide an implementation:</a:t>
-            </a:r>
-            <a:endParaRPr lang="en-US" sz="3600" dirty="0"/>
-          </a:p>
-        </p:txBody>
-      </p:sp>
-      <p:sp>
-        <p:nvSpPr>
-          <p:cNvPr id="5" name="TextBox 4">
-            <a:extLst>
-              <a:ext uri="{FF2B5EF4-FFF2-40B4-BE49-F238E27FC236}">
-                <a16:creationId xmlns:a16="http://schemas.microsoft.com/office/drawing/2014/main" id="{C28CD9FA-A17D-9B10-5992-74A152AB94E9}"/>
-              </a:ext>
-            </a:extLst>
-          </p:cNvPr>
-          <p:cNvSpPr txBox="1"/>
-          <p:nvPr/>
-        </p:nvSpPr>
-        <p:spPr>
-          <a:xfrm>
-            <a:off x="416560" y="3521968"/>
-            <a:ext cx="8564880" cy="3046988"/>
-          </a:xfrm>
-          <a:prstGeom prst="rect">
-            <a:avLst/>
-          </a:prstGeom>
-          <a:noFill/>
-        </p:spPr>
-        <p:txBody>
-          <a:bodyPr wrap="square">
-            <a:spAutoFit/>
-          </a:bodyPr>
-          <a:lstStyle/>
-          <a:p>
-            <a:r>
-              <a:rPr lang="en-US" sz="2400" b="1" i="0" dirty="0">
-                <a:effectLst/>
-                <a:latin typeface="Source Code Pro" panose="020B0509030403020204" pitchFamily="49" charset="0"/>
-              </a:rPr>
-              <a:t>public</a:t>
-            </a:r>
-            <a:r>
-              <a:rPr lang="en-US" sz="2400" b="0" i="0" dirty="0">
-                <a:effectLst/>
-                <a:latin typeface="Source Code Pro" panose="020B0509030403020204" pitchFamily="49" charset="0"/>
-              </a:rPr>
-              <a:t> </a:t>
-            </a:r>
-            <a:r>
-              <a:rPr lang="en-US" sz="2400" b="1" i="0" dirty="0">
-                <a:effectLst/>
-                <a:latin typeface="Source Code Pro" panose="020B0509030403020204" pitchFamily="49" charset="0"/>
-              </a:rPr>
-              <a:t>interface</a:t>
-            </a:r>
-            <a:r>
-              <a:rPr lang="en-US" sz="2400" b="0" i="0" dirty="0">
-                <a:effectLst/>
-                <a:latin typeface="Source Code Pro" panose="020B0509030403020204" pitchFamily="49" charset="0"/>
-              </a:rPr>
-              <a:t> </a:t>
-            </a:r>
-            <a:r>
-              <a:rPr lang="en-US" sz="2400" b="1" i="0" dirty="0" err="1">
-                <a:effectLst/>
-                <a:latin typeface="Source Code Pro" panose="020B0509030403020204" pitchFamily="49" charset="0"/>
-              </a:rPr>
-              <a:t>MyInterface</a:t>
-            </a:r>
-            <a:r>
-              <a:rPr lang="en-US" sz="2400" b="0" i="0" dirty="0">
-                <a:effectLst/>
-                <a:latin typeface="Source Code Pro" panose="020B0509030403020204" pitchFamily="49" charset="0"/>
-              </a:rPr>
-              <a:t> { </a:t>
-            </a:r>
-            <a:br>
-              <a:rPr lang="en-US" sz="2400" b="0" i="0" dirty="0">
-                <a:effectLst/>
-                <a:latin typeface="Source Code Pro" panose="020B0509030403020204" pitchFamily="49" charset="0"/>
-              </a:rPr>
-            </a:br>
-            <a:r>
-              <a:rPr lang="en-US" sz="2400" b="0" i="0" dirty="0">
-                <a:effectLst/>
-                <a:latin typeface="Source Code Pro" panose="020B0509030403020204" pitchFamily="49" charset="0"/>
-              </a:rPr>
-              <a:t>  // regular interface method</a:t>
-            </a:r>
-          </a:p>
-          <a:p>
-            <a:r>
-              <a:rPr lang="en-US" sz="2400" dirty="0">
-                <a:latin typeface="Source Code Pro" panose="020B0509030403020204" pitchFamily="49" charset="0"/>
-              </a:rPr>
-              <a:t>  </a:t>
-            </a:r>
-            <a:r>
-              <a:rPr lang="en-US" sz="2400" b="1" dirty="0">
-                <a:latin typeface="Source Code Pro" panose="020B0509030403020204" pitchFamily="49" charset="0"/>
-              </a:rPr>
-              <a:t>void </a:t>
-            </a:r>
-            <a:r>
-              <a:rPr lang="en-US" sz="2400" b="1" dirty="0" err="1">
-                <a:latin typeface="Source Code Pro" panose="020B0509030403020204" pitchFamily="49" charset="0"/>
-              </a:rPr>
-              <a:t>normalMethod</a:t>
-            </a:r>
-            <a:r>
-              <a:rPr lang="en-US" sz="2400" b="1" dirty="0">
-                <a:latin typeface="Source Code Pro" panose="020B0509030403020204" pitchFamily="49" charset="0"/>
-              </a:rPr>
-              <a:t>()</a:t>
-            </a:r>
-            <a:r>
-              <a:rPr lang="en-US" sz="2400" b="1" dirty="0">
-                <a:highlight>
-                  <a:srgbClr val="FFFF00"/>
-                </a:highlight>
-                <a:latin typeface="Source Code Pro" panose="020B0509030403020204" pitchFamily="49" charset="0"/>
-              </a:rPr>
-              <a:t>;</a:t>
-            </a:r>
-            <a:r>
-              <a:rPr lang="en-US" sz="2400" b="1" dirty="0">
-                <a:latin typeface="Source Code Pro" panose="020B0509030403020204" pitchFamily="49" charset="0"/>
-              </a:rPr>
-              <a:t>  </a:t>
-            </a:r>
-            <a:r>
-              <a:rPr lang="en-US" sz="2400" b="1" dirty="0">
-                <a:solidFill>
-                  <a:srgbClr val="008000"/>
-                </a:solidFill>
-                <a:latin typeface="Source Code Pro" panose="020B0509030403020204" pitchFamily="49" charset="0"/>
-                <a:sym typeface="Wingdings" panose="05000000000000000000" pitchFamily="2" charset="2"/>
-              </a:rPr>
-              <a:t></a:t>
-            </a:r>
-            <a:r>
-              <a:rPr lang="en-US" sz="2400" b="1" dirty="0">
-                <a:solidFill>
-                  <a:srgbClr val="008000"/>
-                </a:solidFill>
-                <a:latin typeface="Source Code Pro" panose="020B0509030403020204" pitchFamily="49" charset="0"/>
-              </a:rPr>
-              <a:t> no implementation</a:t>
-            </a:r>
-            <a:br>
-              <a:rPr lang="en-US" sz="2400" b="0" i="0" dirty="0">
-                <a:solidFill>
-                  <a:schemeClr val="accent6">
-                    <a:lumMod val="75000"/>
-                  </a:schemeClr>
-                </a:solidFill>
-                <a:effectLst/>
-                <a:latin typeface="Source Code Pro" panose="020B0509030403020204" pitchFamily="49" charset="0"/>
-              </a:rPr>
-            </a:br>
-            <a:endParaRPr lang="en-US" sz="2400" b="0" i="0" dirty="0">
-              <a:solidFill>
-                <a:schemeClr val="accent6">
-                  <a:lumMod val="75000"/>
-                </a:schemeClr>
-              </a:solidFill>
-              <a:effectLst/>
-              <a:latin typeface="Source Code Pro" panose="020B0509030403020204" pitchFamily="49" charset="0"/>
-            </a:endParaRPr>
-          </a:p>
-          <a:p>
-            <a:r>
-              <a:rPr lang="en-US" sz="2400" dirty="0">
-                <a:solidFill>
-                  <a:schemeClr val="accent6">
-                    <a:lumMod val="75000"/>
-                  </a:schemeClr>
-                </a:solidFill>
-                <a:latin typeface="Source Code Pro" panose="020B0509030403020204" pitchFamily="49" charset="0"/>
-              </a:rPr>
-              <a:t>  </a:t>
-            </a:r>
-            <a:r>
-              <a:rPr lang="en-US" sz="2400" b="1" i="0" dirty="0">
-                <a:solidFill>
-                  <a:schemeClr val="accent6">
-                    <a:lumMod val="75000"/>
-                  </a:schemeClr>
-                </a:solidFill>
-                <a:effectLst/>
-                <a:latin typeface="Source Code Pro" panose="020B0509030403020204" pitchFamily="49" charset="0"/>
-              </a:rPr>
-              <a:t>default</a:t>
-            </a:r>
-            <a:r>
-              <a:rPr lang="en-US" sz="2400" b="0" i="0" dirty="0">
-                <a:solidFill>
-                  <a:schemeClr val="accent6">
-                    <a:lumMod val="75000"/>
-                  </a:schemeClr>
-                </a:solidFill>
-                <a:effectLst/>
-                <a:latin typeface="Source Code Pro" panose="020B0509030403020204" pitchFamily="49" charset="0"/>
-              </a:rPr>
-              <a:t> </a:t>
-            </a:r>
-            <a:r>
-              <a:rPr lang="en-US" sz="2400" b="1" i="0" dirty="0">
-                <a:solidFill>
-                  <a:schemeClr val="accent6">
-                    <a:lumMod val="75000"/>
-                  </a:schemeClr>
-                </a:solidFill>
-                <a:effectLst/>
-                <a:latin typeface="Source Code Pro" panose="020B0509030403020204" pitchFamily="49" charset="0"/>
-              </a:rPr>
-              <a:t>void</a:t>
-            </a:r>
-            <a:r>
-              <a:rPr lang="en-US" sz="2400" b="0" i="0" dirty="0">
-                <a:solidFill>
-                  <a:schemeClr val="accent6">
-                    <a:lumMod val="75000"/>
-                  </a:schemeClr>
-                </a:solidFill>
-                <a:effectLst/>
-                <a:latin typeface="Source Code Pro" panose="020B0509030403020204" pitchFamily="49" charset="0"/>
-              </a:rPr>
-              <a:t> </a:t>
-            </a:r>
-            <a:r>
-              <a:rPr lang="en-US" sz="2400" b="1" i="0" dirty="0" err="1">
-                <a:solidFill>
-                  <a:schemeClr val="accent6">
-                    <a:lumMod val="75000"/>
-                  </a:schemeClr>
-                </a:solidFill>
-                <a:effectLst/>
-                <a:latin typeface="Source Code Pro" panose="020B0509030403020204" pitchFamily="49" charset="0"/>
-              </a:rPr>
-              <a:t>defaultMethod</a:t>
-            </a:r>
-            <a:r>
-              <a:rPr lang="en-US" sz="2400" b="0" i="0" dirty="0">
-                <a:solidFill>
-                  <a:schemeClr val="accent6">
-                    <a:lumMod val="75000"/>
-                  </a:schemeClr>
-                </a:solidFill>
-                <a:effectLst/>
-                <a:latin typeface="Source Code Pro" panose="020B0509030403020204" pitchFamily="49" charset="0"/>
-              </a:rPr>
-              <a:t>() { </a:t>
-            </a:r>
-            <a:br>
-              <a:rPr lang="en-US" sz="2400" b="0" i="0" dirty="0">
-                <a:solidFill>
-                  <a:schemeClr val="accent6">
-                    <a:lumMod val="75000"/>
-                  </a:schemeClr>
-                </a:solidFill>
-                <a:effectLst/>
-                <a:latin typeface="Source Code Pro" panose="020B0509030403020204" pitchFamily="49" charset="0"/>
-              </a:rPr>
-            </a:br>
-            <a:r>
-              <a:rPr lang="en-US" sz="2400" b="0" i="0" dirty="0">
-                <a:solidFill>
-                  <a:schemeClr val="accent6">
-                    <a:lumMod val="75000"/>
-                  </a:schemeClr>
-                </a:solidFill>
-                <a:effectLst/>
-                <a:latin typeface="Source Code Pro" panose="020B0509030403020204" pitchFamily="49" charset="0"/>
-              </a:rPr>
-              <a:t>    // implementation </a:t>
-            </a:r>
-            <a:br>
-              <a:rPr lang="en-US" sz="2400" b="0" i="0" dirty="0">
-                <a:solidFill>
-                  <a:schemeClr val="accent6">
-                    <a:lumMod val="75000"/>
-                  </a:schemeClr>
-                </a:solidFill>
-                <a:effectLst/>
-                <a:latin typeface="Source Code Pro" panose="020B0509030403020204" pitchFamily="49" charset="0"/>
-              </a:rPr>
-            </a:br>
-            <a:r>
-              <a:rPr lang="en-US" sz="2400" b="0" i="0" dirty="0">
-                <a:solidFill>
-                  <a:schemeClr val="accent6">
-                    <a:lumMod val="75000"/>
-                  </a:schemeClr>
-                </a:solidFill>
-                <a:effectLst/>
-                <a:latin typeface="Source Code Pro" panose="020B0509030403020204" pitchFamily="49" charset="0"/>
-              </a:rPr>
-              <a:t>  } </a:t>
-            </a:r>
-            <a:br>
-              <a:rPr lang="en-US" sz="2400" b="0" i="0" dirty="0">
-                <a:solidFill>
-                  <a:schemeClr val="accent6">
-                    <a:lumMod val="75000"/>
-                  </a:schemeClr>
-                </a:solidFill>
-                <a:effectLst/>
-                <a:latin typeface="Source Code Pro" panose="020B0509030403020204" pitchFamily="49" charset="0"/>
-              </a:rPr>
-            </a:br>
-            <a:r>
-              <a:rPr lang="en-US" sz="2400" b="0" i="0" dirty="0">
-                <a:effectLst/>
-                <a:latin typeface="Source Code Pro" panose="020B0509030403020204" pitchFamily="49" charset="0"/>
-              </a:rPr>
-              <a:t>}</a:t>
-            </a:r>
-            <a:endParaRPr lang="en-US" sz="2400" dirty="0"/>
-          </a:p>
-        </p:txBody>
-      </p:sp>
-    </p:spTree>
-    <p:extLst>
-      <p:ext uri="{BB962C8B-B14F-4D97-AF65-F5344CB8AC3E}">
-        <p14:creationId xmlns:p14="http://schemas.microsoft.com/office/powerpoint/2010/main" val="893038708"/>
-      </p:ext>
-    </p:extLst>
-  </p:cSld>
-  <p:clrMapOvr>
-    <a:masterClrMapping/>
-  </p:clrMapOvr>
 </p:sld>
 </file>
 
